--- a/Portfolio_slides.pptx
+++ b/Portfolio_slides.pptx
@@ -15,6 +15,8 @@
     <p:sldId id="263" r:id="rId14"/>
     <p:sldId id="264" r:id="rId15"/>
     <p:sldId id="265" r:id="rId16"/>
+    <p:sldId id="266" r:id="rId17"/>
+    <p:sldId id="267" r:id="rId18"/>
   </p:sldIdLst>
   <p:sldSz cx="12191695" cy="6858000" type="screen4x3"/>
   <p:notesSz cx="6858000" cy="9144000"/>
@@ -3353,7 +3355,7 @@
                 </a:solidFill>
                 <a:latin typeface="맑은 고딕"/>
               </a:rPr>
-              <a:t>SKILLS &amp; TAKEAWAYS</a:t>
+              <a:t>ROBUSTNESS</a:t>
             </a:r>
           </a:p>
         </p:txBody>
@@ -3392,7 +3394,7 @@
                 </a:solidFill>
                 <a:latin typeface="맑은 고딕"/>
               </a:rPr>
-              <a:t>사용한 기술과 얻은 교훈</a:t>
+              <a:t>'30mm를 골라서 나온 우연' 아닌가?</a:t>
             </a:r>
           </a:p>
         </p:txBody>
@@ -3432,6 +3434,1016 @@
                 <a:latin typeface="맑은 고딕"/>
               </a:rPr>
               <a:t>10</a:t>
+            </a:r>
+          </a:p>
+        </p:txBody>
+      </p:sp>
+      <p:pic>
+        <p:nvPicPr>
+          <p:cNvPr id="5" name="Picture 4" descr="pt_03_robustness.png"/>
+          <p:cNvPicPr>
+            <a:picLocks noChangeAspect="1"/>
+          </p:cNvPicPr>
+          <p:nvPr/>
+        </p:nvPicPr>
+        <p:blipFill>
+          <a:blip r:embed="rId2"/>
+          <a:stretch>
+            <a:fillRect/>
+          </a:stretch>
+        </p:blipFill>
+        <p:spPr>
+          <a:xfrm>
+            <a:off x="548640" y="1600200"/>
+            <a:ext cx="6650182" cy="4572000"/>
+          </a:xfrm>
+          <a:prstGeom prst="rect">
+            <a:avLst/>
+          </a:prstGeom>
+        </p:spPr>
+      </p:pic>
+      <p:sp>
+        <p:nvSpPr>
+          <p:cNvPr id="6" name="TextBox 5"/>
+          <p:cNvSpPr txBox="1"/>
+          <p:nvPr/>
+        </p:nvSpPr>
+        <p:spPr>
+          <a:xfrm>
+            <a:off x="7406640" y="1828800"/>
+            <a:ext cx="4297680" cy="365760"/>
+          </a:xfrm>
+          <a:prstGeom prst="rect">
+            <a:avLst/>
+          </a:prstGeom>
+          <a:noFill/>
+        </p:spPr>
+        <p:txBody>
+          <a:bodyPr wrap="square" anchor="t">
+            <a:spAutoFit/>
+          </a:bodyPr>
+          <a:lstStyle/>
+          <a:p>
+            <a:pPr algn="l">
+              <a:lnSpc>
+                <a:spcPct val="120000"/>
+              </a:lnSpc>
+            </a:pPr>
+            <a:r>
+              <a:rPr sz="1500" b="1">
+                <a:solidFill>
+                  <a:srgbClr val="2F7D5B"/>
+                </a:solidFill>
+                <a:latin typeface="맑은 고딕"/>
+              </a:rPr>
+              <a:t>✓  호우 기준값 15~40mm</a:t>
+            </a:r>
+          </a:p>
+        </p:txBody>
+      </p:sp>
+      <p:sp>
+        <p:nvSpPr>
+          <p:cNvPr id="7" name="TextBox 6"/>
+          <p:cNvSpPr txBox="1"/>
+          <p:nvPr/>
+        </p:nvSpPr>
+        <p:spPr>
+          <a:xfrm>
+            <a:off x="7726679" y="2212848"/>
+            <a:ext cx="3977639" cy="822960"/>
+          </a:xfrm>
+          <a:prstGeom prst="rect">
+            <a:avLst/>
+          </a:prstGeom>
+          <a:noFill/>
+        </p:spPr>
+        <p:txBody>
+          <a:bodyPr wrap="square" anchor="t">
+            <a:spAutoFit/>
+          </a:bodyPr>
+          <a:lstStyle/>
+          <a:p>
+            <a:pPr algn="l">
+              <a:lnSpc>
+                <a:spcPct val="130000"/>
+              </a:lnSpc>
+            </a:pPr>
+            <a:r>
+              <a:rPr sz="1300" b="0">
+                <a:solidFill>
+                  <a:srgbClr val="646A73"/>
+                </a:solidFill>
+                <a:latin typeface="맑은 고딕"/>
+              </a:rPr>
+              <a:t>6단계 모두 방문객(−17.6~−19.5%)이 지역주민(−5.9~−9.0%)보다 크게 감소</a:t>
+            </a:r>
+          </a:p>
+        </p:txBody>
+      </p:sp>
+      <p:sp>
+        <p:nvSpPr>
+          <p:cNvPr id="8" name="TextBox 7"/>
+          <p:cNvSpPr txBox="1"/>
+          <p:nvPr/>
+        </p:nvSpPr>
+        <p:spPr>
+          <a:xfrm>
+            <a:off x="7406640" y="3154680"/>
+            <a:ext cx="4297680" cy="365760"/>
+          </a:xfrm>
+          <a:prstGeom prst="rect">
+            <a:avLst/>
+          </a:prstGeom>
+          <a:noFill/>
+        </p:spPr>
+        <p:txBody>
+          <a:bodyPr wrap="square" anchor="t">
+            <a:spAutoFit/>
+          </a:bodyPr>
+          <a:lstStyle/>
+          <a:p>
+            <a:pPr algn="l">
+              <a:lnSpc>
+                <a:spcPct val="120000"/>
+              </a:lnSpc>
+            </a:pPr>
+            <a:r>
+              <a:rPr sz="1500" b="1">
+                <a:solidFill>
+                  <a:srgbClr val="2F7D5B"/>
+                </a:solidFill>
+                <a:latin typeface="맑은 고딕"/>
+              </a:rPr>
+              <a:t>✓  전일 강수 지연효과</a:t>
+            </a:r>
+          </a:p>
+        </p:txBody>
+      </p:sp>
+      <p:sp>
+        <p:nvSpPr>
+          <p:cNvPr id="9" name="TextBox 8"/>
+          <p:cNvSpPr txBox="1"/>
+          <p:nvPr/>
+        </p:nvSpPr>
+        <p:spPr>
+          <a:xfrm>
+            <a:off x="7726679" y="3538728"/>
+            <a:ext cx="3977639" cy="822960"/>
+          </a:xfrm>
+          <a:prstGeom prst="rect">
+            <a:avLst/>
+          </a:prstGeom>
+          <a:noFill/>
+        </p:spPr>
+        <p:txBody>
+          <a:bodyPr wrap="square" anchor="t">
+            <a:spAutoFit/>
+          </a:bodyPr>
+          <a:lstStyle/>
+          <a:p>
+            <a:pPr algn="l">
+              <a:lnSpc>
+                <a:spcPct val="130000"/>
+              </a:lnSpc>
+            </a:pPr>
+            <a:r>
+              <a:rPr sz="1300" b="0">
+                <a:solidFill>
+                  <a:srgbClr val="646A73"/>
+                </a:solidFill>
+                <a:latin typeface="맑은 고딕"/>
+              </a:rPr>
+              <a:t>'어제 호우' 변수 추가 → 지연효과 없음(p=0.46~0.73), 당일 효과 유지</a:t>
+            </a:r>
+          </a:p>
+        </p:txBody>
+      </p:sp>
+      <p:sp>
+        <p:nvSpPr>
+          <p:cNvPr id="10" name="TextBox 9"/>
+          <p:cNvSpPr txBox="1"/>
+          <p:nvPr/>
+        </p:nvSpPr>
+        <p:spPr>
+          <a:xfrm>
+            <a:off x="7406640" y="4480560"/>
+            <a:ext cx="4297680" cy="365760"/>
+          </a:xfrm>
+          <a:prstGeom prst="rect">
+            <a:avLst/>
+          </a:prstGeom>
+          <a:noFill/>
+        </p:spPr>
+        <p:txBody>
+          <a:bodyPr wrap="square" anchor="t">
+            <a:spAutoFit/>
+          </a:bodyPr>
+          <a:lstStyle/>
+          <a:p>
+            <a:pPr algn="l">
+              <a:lnSpc>
+                <a:spcPct val="120000"/>
+              </a:lnSpc>
+            </a:pPr>
+            <a:r>
+              <a:rPr sz="1500" b="1">
+                <a:solidFill>
+                  <a:srgbClr val="2F7D5B"/>
+                </a:solidFill>
+                <a:latin typeface="맑은 고딕"/>
+              </a:rPr>
+              <a:t>✓  폭염 기준 30~35℃</a:t>
+            </a:r>
+          </a:p>
+        </p:txBody>
+      </p:sp>
+      <p:sp>
+        <p:nvSpPr>
+          <p:cNvPr id="11" name="TextBox 10"/>
+          <p:cNvSpPr txBox="1"/>
+          <p:nvPr/>
+        </p:nvSpPr>
+        <p:spPr>
+          <a:xfrm>
+            <a:off x="7726679" y="4864608"/>
+            <a:ext cx="3977639" cy="822960"/>
+          </a:xfrm>
+          <a:prstGeom prst="rect">
+            <a:avLst/>
+          </a:prstGeom>
+          <a:noFill/>
+        </p:spPr>
+        <p:txBody>
+          <a:bodyPr wrap="square" anchor="t">
+            <a:spAutoFit/>
+          </a:bodyPr>
+          <a:lstStyle/>
+          <a:p>
+            <a:pPr algn="l">
+              <a:lnSpc>
+                <a:spcPct val="130000"/>
+              </a:lnSpc>
+            </a:pPr>
+            <a:r>
+              <a:rPr sz="1300" b="0">
+                <a:solidFill>
+                  <a:srgbClr val="646A73"/>
+                </a:solidFill>
+                <a:latin typeface="맑은 고딕"/>
+              </a:rPr>
+              <a:t>전 구간 유의하지 않음 → 원 결론과 일치</a:t>
+            </a:r>
+          </a:p>
+        </p:txBody>
+      </p:sp>
+    </p:spTree>
+  </p:cSld>
+  <p:clrMapOvr>
+    <a:masterClrMapping/>
+  </p:clrMapOvr>
+</p:sld>
+</file>
+
+<file path=ppt/slides/slide11.xml><?xml version="1.0" encoding="utf-8"?>
+<p:sld xmlns:a="http://schemas.openxmlformats.org/drawingml/2006/main" xmlns:p="http://schemas.openxmlformats.org/presentationml/2006/main" xmlns:r="http://schemas.openxmlformats.org/officeDocument/2006/relationships">
+  <p:cSld>
+    <p:bg>
+      <p:bgPr>
+        <a:solidFill>
+          <a:srgbClr val="FFFFFF"/>
+        </a:solidFill>
+        <a:effectLst/>
+      </p:bgPr>
+    </p:bg>
+    <p:spTree>
+      <p:nvGrpSpPr>
+        <p:cNvPr id="1" name=""/>
+        <p:cNvGrpSpPr/>
+        <p:nvPr/>
+      </p:nvGrpSpPr>
+      <p:grpSpPr/>
+      <p:sp>
+        <p:nvSpPr>
+          <p:cNvPr id="2" name="TextBox 1"/>
+          <p:cNvSpPr txBox="1"/>
+          <p:nvPr/>
+        </p:nvSpPr>
+        <p:spPr>
+          <a:xfrm>
+            <a:off x="640080" y="411480"/>
+            <a:ext cx="10058400" cy="365760"/>
+          </a:xfrm>
+          <a:prstGeom prst="rect">
+            <a:avLst/>
+          </a:prstGeom>
+          <a:noFill/>
+        </p:spPr>
+        <p:txBody>
+          <a:bodyPr wrap="square" anchor="t">
+            <a:spAutoFit/>
+          </a:bodyPr>
+          <a:lstStyle/>
+          <a:p>
+            <a:pPr algn="l">
+              <a:lnSpc>
+                <a:spcPct val="120000"/>
+              </a:lnSpc>
+            </a:pPr>
+            <a:r>
+              <a:rPr sz="1200" b="1">
+                <a:solidFill>
+                  <a:srgbClr val="646A73"/>
+                </a:solidFill>
+                <a:latin typeface="맑은 고딕"/>
+              </a:rPr>
+              <a:t>IMPACT &amp; LIMITS</a:t>
+            </a:r>
+          </a:p>
+        </p:txBody>
+      </p:sp>
+      <p:sp>
+        <p:nvSpPr>
+          <p:cNvPr id="3" name="TextBox 2"/>
+          <p:cNvSpPr txBox="1"/>
+          <p:nvPr/>
+        </p:nvSpPr>
+        <p:spPr>
+          <a:xfrm>
+            <a:off x="640080" y="731520"/>
+            <a:ext cx="10972800" cy="731520"/>
+          </a:xfrm>
+          <a:prstGeom prst="rect">
+            <a:avLst/>
+          </a:prstGeom>
+          <a:noFill/>
+        </p:spPr>
+        <p:txBody>
+          <a:bodyPr wrap="square" anchor="t">
+            <a:spAutoFit/>
+          </a:bodyPr>
+          <a:lstStyle/>
+          <a:p>
+            <a:pPr algn="l">
+              <a:lnSpc>
+                <a:spcPct val="120000"/>
+              </a:lnSpc>
+            </a:pPr>
+            <a:r>
+              <a:rPr sz="2800" b="1">
+                <a:solidFill>
+                  <a:srgbClr val="1D1F23"/>
+                </a:solidFill>
+                <a:latin typeface="맑은 고딕"/>
+              </a:rPr>
+              <a:t>어디에 쓸 수 있고, 무엇을 말하지 않는가</a:t>
+            </a:r>
+          </a:p>
+        </p:txBody>
+      </p:sp>
+      <p:sp>
+        <p:nvSpPr>
+          <p:cNvPr id="4" name="TextBox 3"/>
+          <p:cNvSpPr txBox="1"/>
+          <p:nvPr/>
+        </p:nvSpPr>
+        <p:spPr>
+          <a:xfrm>
+            <a:off x="10972800" y="6400800"/>
+            <a:ext cx="822960" cy="274320"/>
+          </a:xfrm>
+          <a:prstGeom prst="rect">
+            <a:avLst/>
+          </a:prstGeom>
+          <a:noFill/>
+        </p:spPr>
+        <p:txBody>
+          <a:bodyPr wrap="square" anchor="t">
+            <a:spAutoFit/>
+          </a:bodyPr>
+          <a:lstStyle/>
+          <a:p>
+            <a:pPr algn="r">
+              <a:lnSpc>
+                <a:spcPct val="120000"/>
+              </a:lnSpc>
+            </a:pPr>
+            <a:r>
+              <a:rPr sz="1100" b="0">
+                <a:solidFill>
+                  <a:srgbClr val="646A73"/>
+                </a:solidFill>
+                <a:latin typeface="맑은 고딕"/>
+              </a:rPr>
+              <a:t>11</a:t>
+            </a:r>
+          </a:p>
+        </p:txBody>
+      </p:sp>
+      <p:sp>
+        <p:nvSpPr>
+          <p:cNvPr id="5" name="TextBox 4"/>
+          <p:cNvSpPr txBox="1"/>
+          <p:nvPr/>
+        </p:nvSpPr>
+        <p:spPr>
+          <a:xfrm>
+            <a:off x="640080" y="1645920"/>
+            <a:ext cx="5486400" cy="365760"/>
+          </a:xfrm>
+          <a:prstGeom prst="rect">
+            <a:avLst/>
+          </a:prstGeom>
+          <a:noFill/>
+        </p:spPr>
+        <p:txBody>
+          <a:bodyPr wrap="square" anchor="t">
+            <a:spAutoFit/>
+          </a:bodyPr>
+          <a:lstStyle/>
+          <a:p>
+            <a:pPr algn="l">
+              <a:lnSpc>
+                <a:spcPct val="120000"/>
+              </a:lnSpc>
+            </a:pPr>
+            <a:r>
+              <a:rPr sz="1700" b="1">
+                <a:solidFill>
+                  <a:srgbClr val="3B6FA0"/>
+                </a:solidFill>
+                <a:latin typeface="맑은 고딕"/>
+              </a:rPr>
+              <a:t>시사점</a:t>
+            </a:r>
+          </a:p>
+        </p:txBody>
+      </p:sp>
+      <p:sp>
+        <p:nvSpPr>
+          <p:cNvPr id="6" name="TextBox 5"/>
+          <p:cNvSpPr txBox="1"/>
+          <p:nvPr/>
+        </p:nvSpPr>
+        <p:spPr>
+          <a:xfrm>
+            <a:off x="640080" y="2148840"/>
+            <a:ext cx="5486400" cy="365760"/>
+          </a:xfrm>
+          <a:prstGeom prst="rect">
+            <a:avLst/>
+          </a:prstGeom>
+          <a:noFill/>
+        </p:spPr>
+        <p:txBody>
+          <a:bodyPr wrap="square" anchor="t">
+            <a:spAutoFit/>
+          </a:bodyPr>
+          <a:lstStyle/>
+          <a:p>
+            <a:pPr algn="l">
+              <a:lnSpc>
+                <a:spcPct val="120000"/>
+              </a:lnSpc>
+            </a:pPr>
+            <a:r>
+              <a:rPr sz="1400" b="1">
+                <a:solidFill>
+                  <a:srgbClr val="1D1F23"/>
+                </a:solidFill>
+                <a:latin typeface="맑은 고딕"/>
+              </a:rPr>
+              <a:t>지자체 · 관광공사</a:t>
+            </a:r>
+          </a:p>
+        </p:txBody>
+      </p:sp>
+      <p:sp>
+        <p:nvSpPr>
+          <p:cNvPr id="7" name="TextBox 6"/>
+          <p:cNvSpPr txBox="1"/>
+          <p:nvPr/>
+        </p:nvSpPr>
+        <p:spPr>
+          <a:xfrm>
+            <a:off x="640080" y="2496312"/>
+            <a:ext cx="5394960" cy="731520"/>
+          </a:xfrm>
+          <a:prstGeom prst="rect">
+            <a:avLst/>
+          </a:prstGeom>
+          <a:noFill/>
+        </p:spPr>
+        <p:txBody>
+          <a:bodyPr wrap="square" anchor="t">
+            <a:spAutoFit/>
+          </a:bodyPr>
+          <a:lstStyle/>
+          <a:p>
+            <a:pPr algn="l">
+              <a:lnSpc>
+                <a:spcPct val="130000"/>
+              </a:lnSpc>
+            </a:pPr>
+            <a:r>
+              <a:rPr sz="1300" b="0">
+                <a:solidFill>
+                  <a:srgbClr val="646A73"/>
+                </a:solidFill>
+                <a:latin typeface="맑은 고딕"/>
+              </a:rPr>
+              <a:t>고객 거주지 비중만으로 설문 없이 '상권 기후 취약도' 저비용 모니터링</a:t>
+            </a:r>
+          </a:p>
+        </p:txBody>
+      </p:sp>
+      <p:sp>
+        <p:nvSpPr>
+          <p:cNvPr id="8" name="TextBox 7"/>
+          <p:cNvSpPr txBox="1"/>
+          <p:nvPr/>
+        </p:nvSpPr>
+        <p:spPr>
+          <a:xfrm>
+            <a:off x="640080" y="3291840"/>
+            <a:ext cx="5486400" cy="365760"/>
+          </a:xfrm>
+          <a:prstGeom prst="rect">
+            <a:avLst/>
+          </a:prstGeom>
+          <a:noFill/>
+        </p:spPr>
+        <p:txBody>
+          <a:bodyPr wrap="square" anchor="t">
+            <a:spAutoFit/>
+          </a:bodyPr>
+          <a:lstStyle/>
+          <a:p>
+            <a:pPr algn="l">
+              <a:lnSpc>
+                <a:spcPct val="120000"/>
+              </a:lnSpc>
+            </a:pPr>
+            <a:r>
+              <a:rPr sz="1400" b="1">
+                <a:solidFill>
+                  <a:srgbClr val="1D1F23"/>
+                </a:solidFill>
+                <a:latin typeface="맑은 고딕"/>
+              </a:rPr>
+              <a:t>카드사 · 금융</a:t>
+            </a:r>
+          </a:p>
+        </p:txBody>
+      </p:sp>
+      <p:sp>
+        <p:nvSpPr>
+          <p:cNvPr id="9" name="TextBox 8"/>
+          <p:cNvSpPr txBox="1"/>
+          <p:nvPr/>
+        </p:nvSpPr>
+        <p:spPr>
+          <a:xfrm>
+            <a:off x="640080" y="3639312"/>
+            <a:ext cx="5394960" cy="731520"/>
+          </a:xfrm>
+          <a:prstGeom prst="rect">
+            <a:avLst/>
+          </a:prstGeom>
+          <a:noFill/>
+        </p:spPr>
+        <p:txBody>
+          <a:bodyPr wrap="square" anchor="t">
+            <a:spAutoFit/>
+          </a:bodyPr>
+          <a:lstStyle/>
+          <a:p>
+            <a:pPr algn="l">
+              <a:lnSpc>
+                <a:spcPct val="130000"/>
+              </a:lnSpc>
+            </a:pPr>
+            <a:r>
+              <a:rPr sz="1300" b="0">
+                <a:solidFill>
+                  <a:srgbClr val="646A73"/>
+                </a:solidFill>
+                <a:latin typeface="맑은 고딕"/>
+              </a:rPr>
+              <a:t>업종·지역별 비 민감도를 날씨 연동 소상공인 상품의 초기 리스크 근거로</a:t>
+            </a:r>
+          </a:p>
+        </p:txBody>
+      </p:sp>
+      <p:sp>
+        <p:nvSpPr>
+          <p:cNvPr id="10" name="TextBox 9"/>
+          <p:cNvSpPr txBox="1"/>
+          <p:nvPr/>
+        </p:nvSpPr>
+        <p:spPr>
+          <a:xfrm>
+            <a:off x="640080" y="4434840"/>
+            <a:ext cx="5486400" cy="365760"/>
+          </a:xfrm>
+          <a:prstGeom prst="rect">
+            <a:avLst/>
+          </a:prstGeom>
+          <a:noFill/>
+        </p:spPr>
+        <p:txBody>
+          <a:bodyPr wrap="square" anchor="t">
+            <a:spAutoFit/>
+          </a:bodyPr>
+          <a:lstStyle/>
+          <a:p>
+            <a:pPr algn="l">
+              <a:lnSpc>
+                <a:spcPct val="120000"/>
+              </a:lnSpc>
+            </a:pPr>
+            <a:r>
+              <a:rPr sz="1400" b="1">
+                <a:solidFill>
+                  <a:srgbClr val="1D1F23"/>
+                </a:solidFill>
+                <a:latin typeface="맑은 고딕"/>
+              </a:rPr>
+              <a:t>일반화</a:t>
+            </a:r>
+          </a:p>
+        </p:txBody>
+      </p:sp>
+      <p:sp>
+        <p:nvSpPr>
+          <p:cNvPr id="11" name="TextBox 10"/>
+          <p:cNvSpPr txBox="1"/>
+          <p:nvPr/>
+        </p:nvSpPr>
+        <p:spPr>
+          <a:xfrm>
+            <a:off x="640080" y="4782312"/>
+            <a:ext cx="5394960" cy="731520"/>
+          </a:xfrm>
+          <a:prstGeom prst="rect">
+            <a:avLst/>
+          </a:prstGeom>
+          <a:noFill/>
+        </p:spPr>
+        <p:txBody>
+          <a:bodyPr wrap="square" anchor="t">
+            <a:spAutoFit/>
+          </a:bodyPr>
+          <a:lstStyle/>
+          <a:p>
+            <a:pPr algn="l">
+              <a:lnSpc>
+                <a:spcPct val="130000"/>
+              </a:lnSpc>
+            </a:pPr>
+            <a:r>
+              <a:rPr sz="1300" b="0">
+                <a:solidFill>
+                  <a:srgbClr val="646A73"/>
+                </a:solidFill>
+                <a:latin typeface="맑은 고딕"/>
+              </a:rPr>
+              <a:t>'외지 방문객 매출 비중' 지표는 다른 관광도시에도 같은 방법으로 적용 가능</a:t>
+            </a:r>
+          </a:p>
+        </p:txBody>
+      </p:sp>
+      <p:sp>
+        <p:nvSpPr>
+          <p:cNvPr id="12" name="Rounded Rectangle 11"/>
+          <p:cNvSpPr/>
+          <p:nvPr/>
+        </p:nvSpPr>
+        <p:spPr>
+          <a:xfrm>
+            <a:off x="6492240" y="1645920"/>
+            <a:ext cx="5120640" cy="4480560"/>
+          </a:xfrm>
+          <a:prstGeom prst="roundRect">
+            <a:avLst>
+              <a:gd name="adj" fmla="val 2448"/>
+            </a:avLst>
+          </a:prstGeom>
+          <a:solidFill>
+            <a:srgbClr val="F4EFE4"/>
+          </a:solidFill>
+          <a:ln>
+            <a:noFill/>
+          </a:ln>
+          <a:effectLst/>
+        </p:spPr>
+        <p:style>
+          <a:lnRef idx="1">
+            <a:schemeClr val="accent1"/>
+          </a:lnRef>
+          <a:fillRef idx="3">
+            <a:schemeClr val="accent1"/>
+          </a:fillRef>
+          <a:effectRef idx="2">
+            <a:schemeClr val="accent1"/>
+          </a:effectRef>
+          <a:fontRef idx="minor">
+            <a:schemeClr val="lt1"/>
+          </a:fontRef>
+        </p:style>
+        <p:txBody>
+          <a:bodyPr rtlCol="0" anchor="ctr"/>
+          <a:lstStyle/>
+          <a:p>
+            <a:pPr algn="ctr"/>
+          </a:p>
+        </p:txBody>
+      </p:sp>
+      <p:sp>
+        <p:nvSpPr>
+          <p:cNvPr id="13" name="TextBox 12"/>
+          <p:cNvSpPr txBox="1"/>
+          <p:nvPr/>
+        </p:nvSpPr>
+        <p:spPr>
+          <a:xfrm>
+            <a:off x="6766560" y="1828800"/>
+            <a:ext cx="4663440" cy="365760"/>
+          </a:xfrm>
+          <a:prstGeom prst="rect">
+            <a:avLst/>
+          </a:prstGeom>
+          <a:noFill/>
+        </p:spPr>
+        <p:txBody>
+          <a:bodyPr wrap="square" anchor="t">
+            <a:spAutoFit/>
+          </a:bodyPr>
+          <a:lstStyle/>
+          <a:p>
+            <a:pPr algn="l">
+              <a:lnSpc>
+                <a:spcPct val="120000"/>
+              </a:lnSpc>
+            </a:pPr>
+            <a:r>
+              <a:rPr sz="1700" b="1">
+                <a:solidFill>
+                  <a:srgbClr val="D45B5B"/>
+                </a:solidFill>
+                <a:latin typeface="맑은 고딕"/>
+              </a:rPr>
+              <a:t>한계</a:t>
+            </a:r>
+          </a:p>
+        </p:txBody>
+      </p:sp>
+      <p:sp>
+        <p:nvSpPr>
+          <p:cNvPr id="14" name="TextBox 13"/>
+          <p:cNvSpPr txBox="1"/>
+          <p:nvPr/>
+        </p:nvSpPr>
+        <p:spPr>
+          <a:xfrm>
+            <a:off x="6766560" y="2331720"/>
+            <a:ext cx="4663440" cy="3657600"/>
+          </a:xfrm>
+          <a:prstGeom prst="rect">
+            <a:avLst/>
+          </a:prstGeom>
+          <a:noFill/>
+        </p:spPr>
+        <p:txBody>
+          <a:bodyPr wrap="square" anchor="t">
+            <a:spAutoFit/>
+          </a:bodyPr>
+          <a:lstStyle/>
+          <a:p>
+            <a:pPr algn="l">
+              <a:lnSpc>
+                <a:spcPct val="130000"/>
+              </a:lnSpc>
+            </a:pPr>
+            <a:r>
+              <a:rPr sz="1350" b="0">
+                <a:solidFill>
+                  <a:srgbClr val="1D1F23"/>
+                </a:solidFill>
+                <a:latin typeface="맑은 고딕"/>
+              </a:rPr>
+              <a:t>· 기상 관측소 도시당 1곳 — 강남구는 약 10km 떨어진 종로구 관측소 값으로 대체</a:t>
+            </a:r>
+          </a:p>
+          <a:p>
+            <a:pPr algn="l">
+              <a:lnSpc>
+                <a:spcPct val="130000"/>
+              </a:lnSpc>
+            </a:pPr>
+          </a:p>
+          <a:p>
+            <a:pPr algn="l">
+              <a:lnSpc>
+                <a:spcPct val="130000"/>
+              </a:lnSpc>
+            </a:pPr>
+            <a:r>
+              <a:rPr sz="1350" b="0">
+                <a:solidFill>
+                  <a:srgbClr val="1D1F23"/>
+                </a:solidFill>
+                <a:latin typeface="맑은 고딕"/>
+              </a:rPr>
+              <a:t>· SK 유동인구는 월×요일 평균 패턴 → 검정에는 쓰지 않고 배경 지표로만 사용</a:t>
+            </a:r>
+          </a:p>
+          <a:p>
+            <a:pPr algn="l">
+              <a:lnSpc>
+                <a:spcPct val="130000"/>
+              </a:lnSpc>
+            </a:pPr>
+          </a:p>
+          <a:p>
+            <a:pPr algn="l">
+              <a:lnSpc>
+                <a:spcPct val="130000"/>
+              </a:lnSpc>
+            </a:pPr>
+            <a:r>
+              <a:rPr sz="1350" b="0">
+                <a:solidFill>
+                  <a:srgbClr val="1D1F23"/>
+                </a:solidFill>
+                <a:latin typeface="맑은 고딕"/>
+              </a:rPr>
+              <a:t>· 비교 지역 2곳뿐 → 지역 간 비교의 검정력 한계</a:t>
+            </a:r>
+          </a:p>
+          <a:p>
+            <a:pPr algn="l">
+              <a:lnSpc>
+                <a:spcPct val="130000"/>
+              </a:lnSpc>
+            </a:pPr>
+          </a:p>
+          <a:p>
+            <a:pPr algn="l">
+              <a:lnSpc>
+                <a:spcPct val="130000"/>
+              </a:lnSpc>
+            </a:pPr>
+            <a:r>
+              <a:rPr sz="1350" b="0">
+                <a:solidFill>
+                  <a:srgbClr val="1D1F23"/>
+                </a:solidFill>
+                <a:latin typeface="맑은 고딕"/>
+              </a:rPr>
+              <a:t>· 연관성 분석이며 인과관계를 확정한 것은 아님</a:t>
+            </a:r>
+          </a:p>
+        </p:txBody>
+      </p:sp>
+    </p:spTree>
+  </p:cSld>
+  <p:clrMapOvr>
+    <a:masterClrMapping/>
+  </p:clrMapOvr>
+</p:sld>
+</file>
+
+<file path=ppt/slides/slide12.xml><?xml version="1.0" encoding="utf-8"?>
+<p:sld xmlns:a="http://schemas.openxmlformats.org/drawingml/2006/main" xmlns:p="http://schemas.openxmlformats.org/presentationml/2006/main" xmlns:r="http://schemas.openxmlformats.org/officeDocument/2006/relationships">
+  <p:cSld>
+    <p:bg>
+      <p:bgPr>
+        <a:solidFill>
+          <a:srgbClr val="FFFFFF"/>
+        </a:solidFill>
+        <a:effectLst/>
+      </p:bgPr>
+    </p:bg>
+    <p:spTree>
+      <p:nvGrpSpPr>
+        <p:cNvPr id="1" name=""/>
+        <p:cNvGrpSpPr/>
+        <p:nvPr/>
+      </p:nvGrpSpPr>
+      <p:grpSpPr/>
+      <p:sp>
+        <p:nvSpPr>
+          <p:cNvPr id="2" name="TextBox 1"/>
+          <p:cNvSpPr txBox="1"/>
+          <p:nvPr/>
+        </p:nvSpPr>
+        <p:spPr>
+          <a:xfrm>
+            <a:off x="640080" y="411480"/>
+            <a:ext cx="10058400" cy="365760"/>
+          </a:xfrm>
+          <a:prstGeom prst="rect">
+            <a:avLst/>
+          </a:prstGeom>
+          <a:noFill/>
+        </p:spPr>
+        <p:txBody>
+          <a:bodyPr wrap="square" anchor="t">
+            <a:spAutoFit/>
+          </a:bodyPr>
+          <a:lstStyle/>
+          <a:p>
+            <a:pPr algn="l">
+              <a:lnSpc>
+                <a:spcPct val="120000"/>
+              </a:lnSpc>
+            </a:pPr>
+            <a:r>
+              <a:rPr sz="1200" b="1">
+                <a:solidFill>
+                  <a:srgbClr val="646A73"/>
+                </a:solidFill>
+                <a:latin typeface="맑은 고딕"/>
+              </a:rPr>
+              <a:t>SKILLS &amp; TAKEAWAYS</a:t>
+            </a:r>
+          </a:p>
+        </p:txBody>
+      </p:sp>
+      <p:sp>
+        <p:nvSpPr>
+          <p:cNvPr id="3" name="TextBox 2"/>
+          <p:cNvSpPr txBox="1"/>
+          <p:nvPr/>
+        </p:nvSpPr>
+        <p:spPr>
+          <a:xfrm>
+            <a:off x="640080" y="731520"/>
+            <a:ext cx="10972800" cy="731520"/>
+          </a:xfrm>
+          <a:prstGeom prst="rect">
+            <a:avLst/>
+          </a:prstGeom>
+          <a:noFill/>
+        </p:spPr>
+        <p:txBody>
+          <a:bodyPr wrap="square" anchor="t">
+            <a:spAutoFit/>
+          </a:bodyPr>
+          <a:lstStyle/>
+          <a:p>
+            <a:pPr algn="l">
+              <a:lnSpc>
+                <a:spcPct val="120000"/>
+              </a:lnSpc>
+            </a:pPr>
+            <a:r>
+              <a:rPr sz="2800" b="1">
+                <a:solidFill>
+                  <a:srgbClr val="1D1F23"/>
+                </a:solidFill>
+                <a:latin typeface="맑은 고딕"/>
+              </a:rPr>
+              <a:t>사용한 기술과 얻은 교훈</a:t>
+            </a:r>
+          </a:p>
+        </p:txBody>
+      </p:sp>
+      <p:sp>
+        <p:nvSpPr>
+          <p:cNvPr id="4" name="TextBox 3"/>
+          <p:cNvSpPr txBox="1"/>
+          <p:nvPr/>
+        </p:nvSpPr>
+        <p:spPr>
+          <a:xfrm>
+            <a:off x="10972800" y="6400800"/>
+            <a:ext cx="822960" cy="274320"/>
+          </a:xfrm>
+          <a:prstGeom prst="rect">
+            <a:avLst/>
+          </a:prstGeom>
+          <a:noFill/>
+        </p:spPr>
+        <p:txBody>
+          <a:bodyPr wrap="square" anchor="t">
+            <a:spAutoFit/>
+          </a:bodyPr>
+          <a:lstStyle/>
+          <a:p>
+            <a:pPr algn="r">
+              <a:lnSpc>
+                <a:spcPct val="120000"/>
+              </a:lnSpc>
+            </a:pPr>
+            <a:r>
+              <a:rPr sz="1100" b="0">
+                <a:solidFill>
+                  <a:srgbClr val="646A73"/>
+                </a:solidFill>
+                <a:latin typeface="맑은 고딕"/>
+              </a:rPr>
+              <a:t>12</a:t>
             </a:r>
           </a:p>
         </p:txBody>
@@ -6834,7 +7846,7 @@
                 </a:solidFill>
                 <a:latin typeface="맑은 고딕"/>
               </a:rPr>
-              <a:t>PROCESS</a:t>
+              <a:t>CODE ①  ·  PREPROCESSING</a:t>
             </a:r>
           </a:p>
         </p:txBody>
@@ -6873,7 +7885,7 @@
                 </a:solidFill>
                 <a:latin typeface="맑은 고딕"/>
               </a:rPr>
-              <a:t>가설을 세우고, 틀리면 좁혔다</a:t>
+              <a:t>핵심 코드 — 단위가 다른 데이터를 하나로</a:t>
             </a:r>
           </a:p>
         </p:txBody>
@@ -6919,20 +7931,100 @@
       </p:sp>
       <p:sp>
         <p:nvSpPr>
-          <p:cNvPr id="5" name="Oval 4"/>
+          <p:cNvPr id="5" name="TextBox 4"/>
+          <p:cNvSpPr txBox="1"/>
+          <p:nvPr/>
+        </p:nvSpPr>
+        <p:spPr>
+          <a:xfrm>
+            <a:off x="640080" y="1600200"/>
+            <a:ext cx="5349240" cy="365760"/>
+          </a:xfrm>
+          <a:prstGeom prst="rect">
+            <a:avLst/>
+          </a:prstGeom>
+          <a:noFill/>
+        </p:spPr>
+        <p:txBody>
+          <a:bodyPr wrap="square" anchor="t">
+            <a:spAutoFit/>
+          </a:bodyPr>
+          <a:lstStyle/>
+          <a:p>
+            <a:pPr algn="l">
+              <a:lnSpc>
+                <a:spcPct val="120000"/>
+              </a:lnSpc>
+            </a:pPr>
+            <a:r>
+              <a:rPr sz="1500" b="1">
+                <a:solidFill>
+                  <a:srgbClr val="3B6FA0"/>
+                </a:solidFill>
+                <a:latin typeface="맑은 고딕"/>
+              </a:rPr>
+              <a:t>SK 50m 격자 → 지역</a:t>
+            </a:r>
+          </a:p>
+        </p:txBody>
+      </p:sp>
+      <p:sp>
+        <p:nvSpPr>
+          <p:cNvPr id="6" name="TextBox 5"/>
+          <p:cNvSpPr txBox="1"/>
+          <p:nvPr/>
+        </p:nvSpPr>
+        <p:spPr>
+          <a:xfrm>
+            <a:off x="640080" y="1965960"/>
+            <a:ext cx="5349240" cy="548640"/>
+          </a:xfrm>
+          <a:prstGeom prst="rect">
+            <a:avLst/>
+          </a:prstGeom>
+          <a:noFill/>
+        </p:spPr>
+        <p:txBody>
+          <a:bodyPr wrap="square" anchor="t">
+            <a:spAutoFit/>
+          </a:bodyPr>
+          <a:lstStyle/>
+          <a:p>
+            <a:pPr algn="l">
+              <a:lnSpc>
+                <a:spcPct val="120000"/>
+              </a:lnSpc>
+            </a:pPr>
+            <a:r>
+              <a:rPr sz="1200" b="0">
+                <a:solidFill>
+                  <a:srgbClr val="646A73"/>
+                </a:solidFill>
+                <a:latin typeface="맑은 고딕"/>
+              </a:rPr>
+              <a:t>지역명이 없어 좌표가 크게 점프하는 지점을 경계로 분리, 12월 통째 중복 행 제거</a:t>
+            </a:r>
+          </a:p>
+        </p:txBody>
+      </p:sp>
+      <p:sp>
+        <p:nvSpPr>
+          <p:cNvPr id="7" name="Rounded Rectangle 6"/>
           <p:cNvSpPr/>
           <p:nvPr/>
         </p:nvSpPr>
         <p:spPr>
           <a:xfrm>
-            <a:off x="640080" y="1691640"/>
-            <a:ext cx="457200" cy="457200"/>
-          </a:xfrm>
-          <a:prstGeom prst="ellipse">
-            <a:avLst/>
+            <a:off x="640080" y="2606040"/>
+            <a:ext cx="5349240" cy="3108960"/>
+          </a:xfrm>
+          <a:prstGeom prst="roundRect">
+            <a:avLst>
+              <a:gd name="adj" fmla="val 3529"/>
+            </a:avLst>
           </a:prstGeom>
           <a:solidFill>
-            <a:srgbClr val="1D1F23"/>
+            <a:srgbClr val="1F232A"/>
           </a:solidFill>
           <a:ln>
             <a:noFill/>
@@ -6958,41 +8050,291 @@
           <a:lstStyle/>
           <a:p>
             <a:pPr algn="ctr"/>
-            <a:r>
-              <a:rPr sz="1400" b="1">
-                <a:solidFill>
-                  <a:srgbClr val="FFFFFF"/>
-                </a:solidFill>
-                <a:latin typeface="맑은 고딕"/>
-              </a:rPr>
-              <a:t>1</a:t>
-            </a:r>
-          </a:p>
-        </p:txBody>
-      </p:sp>
-      <p:sp>
-        <p:nvSpPr>
-          <p:cNvPr id="6" name="Rounded Rectangle 5"/>
+          </a:p>
+        </p:txBody>
+      </p:sp>
+      <p:sp>
+        <p:nvSpPr>
+          <p:cNvPr id="8" name="TextBox 7"/>
+          <p:cNvSpPr txBox="1"/>
+          <p:nvPr/>
+        </p:nvSpPr>
+        <p:spPr>
+          <a:xfrm>
+            <a:off x="822959" y="2743200"/>
+            <a:ext cx="5029200" cy="2926080"/>
+          </a:xfrm>
+          <a:prstGeom prst="rect">
+            <a:avLst/>
+          </a:prstGeom>
+          <a:noFill/>
+        </p:spPr>
+        <p:txBody>
+          <a:bodyPr wrap="none">
+            <a:spAutoFit/>
+          </a:bodyPr>
+          <a:lstStyle/>
+          <a:p>
+            <a:pPr>
+              <a:lnSpc>
+                <a:spcPct val="110000"/>
+              </a:lnSpc>
+            </a:pPr>
+            <a:r>
+              <a:rPr sz="1150">
+                <a:solidFill>
+                  <a:srgbClr val="8FBC8F"/>
+                </a:solidFill>
+                <a:latin typeface="Consolas"/>
+              </a:rPr>
+              <a:t># scripts/aggregate_sk_region_month.py</a:t>
+            </a:r>
+          </a:p>
+          <a:p>
+            <a:pPr>
+              <a:lnSpc>
+                <a:spcPct val="110000"/>
+              </a:lnSpc>
+            </a:pPr>
+            <a:r>
+              <a:rPr sz="1150">
+                <a:solidFill>
+                  <a:srgbClr val="E6E6E6"/>
+                </a:solidFill>
+                <a:latin typeface="Consolas"/>
+              </a:rPr>
+              <a:t>X_SPLIT = 983000   # 좌표 점프 지점 = 두 지역 경계</a:t>
+            </a:r>
+          </a:p>
+          <a:p>
+            <a:pPr>
+              <a:lnSpc>
+                <a:spcPct val="110000"/>
+              </a:lnSpc>
+            </a:pPr>
+            <a:r>
+              <a:rPr sz="1150">
+                <a:solidFill>
+                  <a:srgbClr val="E6E6E6"/>
+                </a:solidFill>
+                <a:latin typeface="Consolas"/>
+              </a:rPr>
+              <a:t> </a:t>
+            </a:r>
+          </a:p>
+          <a:p>
+            <a:pPr>
+              <a:lnSpc>
+                <a:spcPct val="110000"/>
+              </a:lnSpc>
+            </a:pPr>
+            <a:r>
+              <a:rPr sz="1150">
+                <a:solidFill>
+                  <a:srgbClr val="E6E6E6"/>
+                </a:solidFill>
+                <a:latin typeface="Consolas"/>
+              </a:rPr>
+              <a:t>def region_of(x):</a:t>
+            </a:r>
+          </a:p>
+          <a:p>
+            <a:pPr>
+              <a:lnSpc>
+                <a:spcPct val="110000"/>
+              </a:lnSpc>
+            </a:pPr>
+            <a:r>
+              <a:rPr sz="1150">
+                <a:solidFill>
+                  <a:srgbClr val="E6E6E6"/>
+                </a:solidFill>
+                <a:latin typeface="Consolas"/>
+              </a:rPr>
+              <a:t>    return '서울 강남구' if x &lt; X_SPLIT else '강원 춘천시'</a:t>
+            </a:r>
+          </a:p>
+          <a:p>
+            <a:pPr>
+              <a:lnSpc>
+                <a:spcPct val="110000"/>
+              </a:lnSpc>
+            </a:pPr>
+            <a:r>
+              <a:rPr sz="1150">
+                <a:solidFill>
+                  <a:srgbClr val="E6E6E6"/>
+                </a:solidFill>
+                <a:latin typeface="Consolas"/>
+              </a:rPr>
+              <a:t> </a:t>
+            </a:r>
+          </a:p>
+          <a:p>
+            <a:pPr>
+              <a:lnSpc>
+                <a:spcPct val="110000"/>
+              </a:lnSpc>
+            </a:pPr>
+            <a:r>
+              <a:rPr sz="1150">
+                <a:solidFill>
+                  <a:srgbClr val="E6E6E6"/>
+                </a:solidFill>
+                <a:latin typeface="Consolas"/>
+              </a:rPr>
+              <a:t>df = df.drop_duplicates()   # 12월 파일 중복 제거</a:t>
+            </a:r>
+          </a:p>
+          <a:p>
+            <a:pPr>
+              <a:lnSpc>
+                <a:spcPct val="110000"/>
+              </a:lnSpc>
+            </a:pPr>
+            <a:r>
+              <a:rPr sz="1150">
+                <a:solidFill>
+                  <a:srgbClr val="E6E6E6"/>
+                </a:solidFill>
+                <a:latin typeface="Consolas"/>
+              </a:rPr>
+              <a:t>df['region'] = df['X_COORD'].apply(region_of)</a:t>
+            </a:r>
+          </a:p>
+          <a:p>
+            <a:pPr>
+              <a:lnSpc>
+                <a:spcPct val="110000"/>
+              </a:lnSpc>
+            </a:pPr>
+            <a:r>
+              <a:rPr sz="1150">
+                <a:solidFill>
+                  <a:srgbClr val="E6E6E6"/>
+                </a:solidFill>
+                <a:latin typeface="Consolas"/>
+              </a:rPr>
+              <a:t>g = (df.groupby(['STD_YM', 'region'])[value_cols]</a:t>
+            </a:r>
+          </a:p>
+          <a:p>
+            <a:pPr>
+              <a:lnSpc>
+                <a:spcPct val="110000"/>
+              </a:lnSpc>
+            </a:pPr>
+            <a:r>
+              <a:rPr sz="1150">
+                <a:solidFill>
+                  <a:srgbClr val="E6E6E6"/>
+                </a:solidFill>
+                <a:latin typeface="Consolas"/>
+              </a:rPr>
+              <a:t>        .sum().reset_index())</a:t>
+            </a:r>
+          </a:p>
+        </p:txBody>
+      </p:sp>
+      <p:sp>
+        <p:nvSpPr>
+          <p:cNvPr id="9" name="TextBox 8"/>
+          <p:cNvSpPr txBox="1"/>
+          <p:nvPr/>
+        </p:nvSpPr>
+        <p:spPr>
+          <a:xfrm>
+            <a:off x="6172200" y="1600200"/>
+            <a:ext cx="5349240" cy="365760"/>
+          </a:xfrm>
+          <a:prstGeom prst="rect">
+            <a:avLst/>
+          </a:prstGeom>
+          <a:noFill/>
+        </p:spPr>
+        <p:txBody>
+          <a:bodyPr wrap="square" anchor="t">
+            <a:spAutoFit/>
+          </a:bodyPr>
+          <a:lstStyle/>
+          <a:p>
+            <a:pPr algn="l">
+              <a:lnSpc>
+                <a:spcPct val="120000"/>
+              </a:lnSpc>
+            </a:pPr>
+            <a:r>
+              <a:rPr sz="1500" b="1">
+                <a:solidFill>
+                  <a:srgbClr val="3B6FA0"/>
+                </a:solidFill>
+                <a:latin typeface="맑은 고딕"/>
+              </a:rPr>
+              <a:t>기상 날짜 기준 · 핵심 소비 · 방문객 구분</a:t>
+            </a:r>
+          </a:p>
+        </p:txBody>
+      </p:sp>
+      <p:sp>
+        <p:nvSpPr>
+          <p:cNvPr id="10" name="TextBox 9"/>
+          <p:cNvSpPr txBox="1"/>
+          <p:nvPr/>
+        </p:nvSpPr>
+        <p:spPr>
+          <a:xfrm>
+            <a:off x="6172200" y="1965960"/>
+            <a:ext cx="5349240" cy="548640"/>
+          </a:xfrm>
+          <a:prstGeom prst="rect">
+            <a:avLst/>
+          </a:prstGeom>
+          <a:noFill/>
+        </p:spPr>
+        <p:txBody>
+          <a:bodyPr wrap="square" anchor="t">
+            <a:spAutoFit/>
+          </a:bodyPr>
+          <a:lstStyle/>
+          <a:p>
+            <a:pPr algn="l">
+              <a:lnSpc>
+                <a:spcPct val="120000"/>
+              </a:lnSpc>
+            </a:pPr>
+            <a:r>
+              <a:rPr sz="1200" b="0">
+                <a:solidFill>
+                  <a:srgbClr val="646A73"/>
+                </a:solidFill>
+                <a:latin typeface="맑은 고딕"/>
+              </a:rPr>
+              <a:t>기상청 하루(01~24시)에 맞추고, 세금·미분류를 뺀 '핵심 소비'와 방문객 여부를 만듦</a:t>
+            </a:r>
+          </a:p>
+        </p:txBody>
+      </p:sp>
+      <p:sp>
+        <p:nvSpPr>
+          <p:cNvPr id="11" name="Rounded Rectangle 10"/>
           <p:cNvSpPr/>
           <p:nvPr/>
         </p:nvSpPr>
         <p:spPr>
           <a:xfrm>
-            <a:off x="1371600" y="1719072"/>
-            <a:ext cx="731520" cy="384048"/>
+            <a:off x="6172200" y="2606040"/>
+            <a:ext cx="5349240" cy="3108960"/>
           </a:xfrm>
           <a:prstGeom prst="roundRect">
             <a:avLst>
-              <a:gd name="adj" fmla="val 28571"/>
+              <a:gd name="adj" fmla="val 3529"/>
             </a:avLst>
           </a:prstGeom>
           <a:solidFill>
-            <a:srgbClr val="FFFFFF"/>
+            <a:srgbClr val="1F232A"/>
           </a:solidFill>
           <a:ln>
-            <a:solidFill>
-              <a:srgbClr val="2F7D5B"/>
-            </a:solidFill>
+            <a:noFill/>
           </a:ln>
           <a:effectLst/>
         </p:spPr>
@@ -7015,242 +8357,6 @@
           <a:lstStyle/>
           <a:p>
             <a:pPr algn="ctr"/>
-            <a:r>
-              <a:rPr sz="1200" b="1">
-                <a:solidFill>
-                  <a:srgbClr val="2F7D5B"/>
-                </a:solidFill>
-                <a:latin typeface="맑은 고딕"/>
-              </a:rPr>
-              <a:t>전환</a:t>
-            </a:r>
-          </a:p>
-        </p:txBody>
-      </p:sp>
-      <p:sp>
-        <p:nvSpPr>
-          <p:cNvPr id="7" name="TextBox 6"/>
-          <p:cNvSpPr txBox="1"/>
-          <p:nvPr/>
-        </p:nvSpPr>
-        <p:spPr>
-          <a:xfrm>
-            <a:off x="2286000" y="1645920"/>
-            <a:ext cx="9326880" cy="411480"/>
-          </a:xfrm>
-          <a:prstGeom prst="rect">
-            <a:avLst/>
-          </a:prstGeom>
-          <a:noFill/>
-        </p:spPr>
-        <p:txBody>
-          <a:bodyPr wrap="square" anchor="t">
-            <a:spAutoFit/>
-          </a:bodyPr>
-          <a:lstStyle/>
-          <a:p>
-            <a:pPr algn="l">
-              <a:lnSpc>
-                <a:spcPct val="120000"/>
-              </a:lnSpc>
-            </a:pPr>
-            <a:r>
-              <a:rPr sz="1600" b="1">
-                <a:solidFill>
-                  <a:srgbClr val="1D1F23"/>
-                </a:solidFill>
-                <a:latin typeface="맑은 고딕"/>
-              </a:rPr>
-              <a:t>첫 탐색: '기후 효과 없음'?</a:t>
-            </a:r>
-          </a:p>
-        </p:txBody>
-      </p:sp>
-      <p:sp>
-        <p:nvSpPr>
-          <p:cNvPr id="8" name="TextBox 7"/>
-          <p:cNvSpPr txBox="1"/>
-          <p:nvPr/>
-        </p:nvSpPr>
-        <p:spPr>
-          <a:xfrm>
-            <a:off x="2286000" y="2057400"/>
-            <a:ext cx="9326880" cy="457200"/>
-          </a:xfrm>
-          <a:prstGeom prst="rect">
-            <a:avLst/>
-          </a:prstGeom>
-          <a:noFill/>
-        </p:spPr>
-        <p:txBody>
-          <a:bodyPr wrap="square" anchor="t">
-            <a:spAutoFit/>
-          </a:bodyPr>
-          <a:lstStyle/>
-          <a:p>
-            <a:pPr algn="l">
-              <a:lnSpc>
-                <a:spcPct val="120000"/>
-              </a:lnSpc>
-            </a:pPr>
-            <a:r>
-              <a:rPr sz="1300" b="0">
-                <a:solidFill>
-                  <a:srgbClr val="646A73"/>
-                </a:solidFill>
-                <a:latin typeface="맑은 고딕"/>
-              </a:rPr>
-              <a:t>세금·미분류 거액 결제가 신호를 덮고 있었음 → '핵심 소비'로 재검정하자 춘천 호우 효과가 드러남</a:t>
-            </a:r>
-          </a:p>
-        </p:txBody>
-      </p:sp>
-      <p:sp>
-        <p:nvSpPr>
-          <p:cNvPr id="9" name="Oval 8"/>
-          <p:cNvSpPr/>
-          <p:nvPr/>
-        </p:nvSpPr>
-        <p:spPr>
-          <a:xfrm>
-            <a:off x="640080" y="2624328"/>
-            <a:ext cx="457200" cy="457200"/>
-          </a:xfrm>
-          <a:prstGeom prst="ellipse">
-            <a:avLst/>
-          </a:prstGeom>
-          <a:solidFill>
-            <a:srgbClr val="1D1F23"/>
-          </a:solidFill>
-          <a:ln>
-            <a:noFill/>
-          </a:ln>
-          <a:effectLst/>
-        </p:spPr>
-        <p:style>
-          <a:lnRef idx="1">
-            <a:schemeClr val="accent1"/>
-          </a:lnRef>
-          <a:fillRef idx="3">
-            <a:schemeClr val="accent1"/>
-          </a:fillRef>
-          <a:effectRef idx="2">
-            <a:schemeClr val="accent1"/>
-          </a:effectRef>
-          <a:fontRef idx="minor">
-            <a:schemeClr val="lt1"/>
-          </a:fontRef>
-        </p:style>
-        <p:txBody>
-          <a:bodyPr rtlCol="0" anchor="ctr"/>
-          <a:lstStyle/>
-          <a:p>
-            <a:pPr algn="ctr"/>
-            <a:r>
-              <a:rPr sz="1400" b="1">
-                <a:solidFill>
-                  <a:srgbClr val="FFFFFF"/>
-                </a:solidFill>
-                <a:latin typeface="맑은 고딕"/>
-              </a:rPr>
-              <a:t>2</a:t>
-            </a:r>
-          </a:p>
-        </p:txBody>
-      </p:sp>
-      <p:sp>
-        <p:nvSpPr>
-          <p:cNvPr id="10" name="Rounded Rectangle 9"/>
-          <p:cNvSpPr/>
-          <p:nvPr/>
-        </p:nvSpPr>
-        <p:spPr>
-          <a:xfrm>
-            <a:off x="1371600" y="2651760"/>
-            <a:ext cx="731520" cy="384048"/>
-          </a:xfrm>
-          <a:prstGeom prst="roundRect">
-            <a:avLst>
-              <a:gd name="adj" fmla="val 28571"/>
-            </a:avLst>
-          </a:prstGeom>
-          <a:solidFill>
-            <a:srgbClr val="FFFFFF"/>
-          </a:solidFill>
-          <a:ln>
-            <a:solidFill>
-              <a:srgbClr val="2F7D5B"/>
-            </a:solidFill>
-          </a:ln>
-          <a:effectLst/>
-        </p:spPr>
-        <p:style>
-          <a:lnRef idx="1">
-            <a:schemeClr val="accent1"/>
-          </a:lnRef>
-          <a:fillRef idx="3">
-            <a:schemeClr val="accent1"/>
-          </a:fillRef>
-          <a:effectRef idx="2">
-            <a:schemeClr val="accent1"/>
-          </a:effectRef>
-          <a:fontRef idx="minor">
-            <a:schemeClr val="lt1"/>
-          </a:fontRef>
-        </p:style>
-        <p:txBody>
-          <a:bodyPr rtlCol="0" anchor="ctr"/>
-          <a:lstStyle/>
-          <a:p>
-            <a:pPr algn="ctr"/>
-            <a:r>
-              <a:rPr sz="1200" b="1">
-                <a:solidFill>
-                  <a:srgbClr val="2F7D5B"/>
-                </a:solidFill>
-                <a:latin typeface="맑은 고딕"/>
-              </a:rPr>
-              <a:t>보완</a:t>
-            </a:r>
-          </a:p>
-        </p:txBody>
-      </p:sp>
-      <p:sp>
-        <p:nvSpPr>
-          <p:cNvPr id="11" name="TextBox 10"/>
-          <p:cNvSpPr txBox="1"/>
-          <p:nvPr/>
-        </p:nvSpPr>
-        <p:spPr>
-          <a:xfrm>
-            <a:off x="2286000" y="2578608"/>
-            <a:ext cx="9326880" cy="411480"/>
-          </a:xfrm>
-          <a:prstGeom prst="rect">
-            <a:avLst/>
-          </a:prstGeom>
-          <a:noFill/>
-        </p:spPr>
-        <p:txBody>
-          <a:bodyPr wrap="square" anchor="t">
-            <a:spAutoFit/>
-          </a:bodyPr>
-          <a:lstStyle/>
-          <a:p>
-            <a:pPr algn="l">
-              <a:lnSpc>
-                <a:spcPct val="120000"/>
-              </a:lnSpc>
-            </a:pPr>
-            <a:r>
-              <a:rPr sz="1600" b="1">
-                <a:solidFill>
-                  <a:srgbClr val="1D1F23"/>
-                </a:solidFill>
-                <a:latin typeface="맑은 고딕"/>
-              </a:rPr>
-              <a:t>검정 방법 업그레이드</a:t>
-            </a:r>
           </a:p>
         </p:txBody>
       </p:sp>
@@ -7262,597 +8368,193 @@
         </p:nvSpPr>
         <p:spPr>
           <a:xfrm>
-            <a:off x="2286000" y="2990088"/>
-            <a:ext cx="9326880" cy="457200"/>
-          </a:xfrm>
-          <a:prstGeom prst="rect">
-            <a:avLst/>
-          </a:prstGeom>
-          <a:noFill/>
-        </p:spPr>
-        <p:txBody>
-          <a:bodyPr wrap="square" anchor="t">
-            <a:spAutoFit/>
-          </a:bodyPr>
-          <a:lstStyle/>
-          <a:p>
-            <a:pPr algn="l">
-              <a:lnSpc>
-                <a:spcPct val="120000"/>
-              </a:lnSpc>
-            </a:pPr>
-            <a:r>
-              <a:rPr sz="1300" b="0">
-                <a:solidFill>
-                  <a:srgbClr val="646A73"/>
-                </a:solidFill>
-                <a:latin typeface="맑은 고딕"/>
-              </a:rPr>
-              <a:t>순열검정의 약점(자기상관·공휴일·다중검정) → 회귀 + HAC 표준오차 + FDR 보정으로 재분석</a:t>
-            </a:r>
-          </a:p>
-        </p:txBody>
-      </p:sp>
-      <p:sp>
-        <p:nvSpPr>
-          <p:cNvPr id="13" name="Oval 12"/>
-          <p:cNvSpPr/>
-          <p:nvPr/>
-        </p:nvSpPr>
-        <p:spPr>
-          <a:xfrm>
-            <a:off x="640080" y="3557016"/>
-            <a:ext cx="457200" cy="457200"/>
-          </a:xfrm>
-          <a:prstGeom prst="ellipse">
-            <a:avLst/>
-          </a:prstGeom>
-          <a:solidFill>
-            <a:srgbClr val="1D1F23"/>
-          </a:solidFill>
-          <a:ln>
-            <a:noFill/>
-          </a:ln>
-          <a:effectLst/>
-        </p:spPr>
-        <p:style>
-          <a:lnRef idx="1">
-            <a:schemeClr val="accent1"/>
-          </a:lnRef>
-          <a:fillRef idx="3">
-            <a:schemeClr val="accent1"/>
-          </a:fillRef>
-          <a:effectRef idx="2">
-            <a:schemeClr val="accent1"/>
-          </a:effectRef>
-          <a:fontRef idx="minor">
-            <a:schemeClr val="lt1"/>
-          </a:fontRef>
-        </p:style>
-        <p:txBody>
-          <a:bodyPr rtlCol="0" anchor="ctr"/>
-          <a:lstStyle/>
-          <a:p>
-            <a:pPr algn="ctr"/>
-            <a:r>
-              <a:rPr sz="1400" b="1">
-                <a:solidFill>
-                  <a:srgbClr val="FFFFFF"/>
-                </a:solidFill>
-                <a:latin typeface="맑은 고딕"/>
-              </a:rPr>
-              <a:t>3</a:t>
-            </a:r>
-          </a:p>
-        </p:txBody>
-      </p:sp>
-      <p:sp>
-        <p:nvSpPr>
-          <p:cNvPr id="14" name="Rounded Rectangle 13"/>
-          <p:cNvSpPr/>
-          <p:nvPr/>
-        </p:nvSpPr>
-        <p:spPr>
-          <a:xfrm>
-            <a:off x="1371600" y="3584448"/>
-            <a:ext cx="731520" cy="384048"/>
-          </a:xfrm>
-          <a:prstGeom prst="roundRect">
-            <a:avLst>
-              <a:gd name="adj" fmla="val 28571"/>
-            </a:avLst>
-          </a:prstGeom>
-          <a:solidFill>
-            <a:srgbClr val="FFFFFF"/>
-          </a:solidFill>
-          <a:ln>
-            <a:solidFill>
-              <a:srgbClr val="A8552F"/>
-            </a:solidFill>
-          </a:ln>
-          <a:effectLst/>
-        </p:spPr>
-        <p:style>
-          <a:lnRef idx="1">
-            <a:schemeClr val="accent1"/>
-          </a:lnRef>
-          <a:fillRef idx="3">
-            <a:schemeClr val="accent1"/>
-          </a:fillRef>
-          <a:effectRef idx="2">
-            <a:schemeClr val="accent1"/>
-          </a:effectRef>
-          <a:fontRef idx="minor">
-            <a:schemeClr val="lt1"/>
-          </a:fontRef>
-        </p:style>
-        <p:txBody>
-          <a:bodyPr rtlCol="0" anchor="ctr"/>
-          <a:lstStyle/>
-          <a:p>
-            <a:pPr algn="ctr"/>
-            <a:r>
-              <a:rPr sz="1200" b="1">
-                <a:solidFill>
-                  <a:srgbClr val="A8552F"/>
-                </a:solidFill>
-                <a:latin typeface="맑은 고딕"/>
-              </a:rPr>
-              <a:t>기각</a:t>
-            </a:r>
-          </a:p>
-        </p:txBody>
-      </p:sp>
-      <p:sp>
-        <p:nvSpPr>
-          <p:cNvPr id="15" name="TextBox 14"/>
-          <p:cNvSpPr txBox="1"/>
-          <p:nvPr/>
-        </p:nvSpPr>
-        <p:spPr>
-          <a:xfrm>
-            <a:off x="2286000" y="3511296"/>
-            <a:ext cx="9326880" cy="411480"/>
-          </a:xfrm>
-          <a:prstGeom prst="rect">
-            <a:avLst/>
-          </a:prstGeom>
-          <a:noFill/>
-        </p:spPr>
-        <p:txBody>
-          <a:bodyPr wrap="square" anchor="t">
-            <a:spAutoFit/>
-          </a:bodyPr>
-          <a:lstStyle/>
-          <a:p>
-            <a:pPr algn="l">
-              <a:lnSpc>
-                <a:spcPct val="120000"/>
-              </a:lnSpc>
-            </a:pPr>
-            <a:r>
-              <a:rPr sz="1600" b="1">
-                <a:solidFill>
-                  <a:srgbClr val="1D1F23"/>
-                </a:solidFill>
-                <a:latin typeface="맑은 고딕"/>
-              </a:rPr>
-              <a:t>가설 A: 방문객 많은 업종일수록 취약</a:t>
-            </a:r>
-          </a:p>
-        </p:txBody>
-      </p:sp>
-      <p:sp>
-        <p:nvSpPr>
-          <p:cNvPr id="16" name="TextBox 15"/>
-          <p:cNvSpPr txBox="1"/>
-          <p:nvPr/>
-        </p:nvSpPr>
-        <p:spPr>
-          <a:xfrm>
-            <a:off x="2286000" y="3922776"/>
-            <a:ext cx="9326880" cy="457200"/>
-          </a:xfrm>
-          <a:prstGeom prst="rect">
-            <a:avLst/>
-          </a:prstGeom>
-          <a:noFill/>
-        </p:spPr>
-        <p:txBody>
-          <a:bodyPr wrap="square" anchor="t">
-            <a:spAutoFit/>
-          </a:bodyPr>
-          <a:lstStyle/>
-          <a:p>
-            <a:pPr algn="l">
-              <a:lnSpc>
-                <a:spcPct val="120000"/>
-              </a:lnSpc>
-            </a:pPr>
-            <a:r>
-              <a:rPr sz="1300" b="0">
-                <a:solidFill>
-                  <a:srgbClr val="646A73"/>
-                </a:solidFill>
-                <a:latin typeface="맑은 고딕"/>
-              </a:rPr>
-              <a:t>업종별 방문객 비중 vs 비 효과 상관 ρ = −0.04(춘천), 0.16(강남) → 관계 없음</a:t>
-            </a:r>
-          </a:p>
-        </p:txBody>
-      </p:sp>
-      <p:sp>
-        <p:nvSpPr>
-          <p:cNvPr id="17" name="Oval 16"/>
-          <p:cNvSpPr/>
-          <p:nvPr/>
-        </p:nvSpPr>
-        <p:spPr>
-          <a:xfrm>
-            <a:off x="640080" y="4489704"/>
-            <a:ext cx="457200" cy="457200"/>
-          </a:xfrm>
-          <a:prstGeom prst="ellipse">
-            <a:avLst/>
-          </a:prstGeom>
-          <a:solidFill>
-            <a:srgbClr val="1D1F23"/>
-          </a:solidFill>
-          <a:ln>
-            <a:noFill/>
-          </a:ln>
-          <a:effectLst/>
-        </p:spPr>
-        <p:style>
-          <a:lnRef idx="1">
-            <a:schemeClr val="accent1"/>
-          </a:lnRef>
-          <a:fillRef idx="3">
-            <a:schemeClr val="accent1"/>
-          </a:fillRef>
-          <a:effectRef idx="2">
-            <a:schemeClr val="accent1"/>
-          </a:effectRef>
-          <a:fontRef idx="minor">
-            <a:schemeClr val="lt1"/>
-          </a:fontRef>
-        </p:style>
-        <p:txBody>
-          <a:bodyPr rtlCol="0" anchor="ctr"/>
-          <a:lstStyle/>
-          <a:p>
-            <a:pPr algn="ctr"/>
-            <a:r>
-              <a:rPr sz="1400" b="1">
-                <a:solidFill>
-                  <a:srgbClr val="FFFFFF"/>
-                </a:solidFill>
-                <a:latin typeface="맑은 고딕"/>
-              </a:rPr>
-              <a:t>4</a:t>
-            </a:r>
-          </a:p>
-        </p:txBody>
-      </p:sp>
-      <p:sp>
-        <p:nvSpPr>
-          <p:cNvPr id="18" name="Rounded Rectangle 17"/>
-          <p:cNvSpPr/>
-          <p:nvPr/>
-        </p:nvSpPr>
-        <p:spPr>
-          <a:xfrm>
-            <a:off x="1371600" y="4517136"/>
-            <a:ext cx="731520" cy="384048"/>
-          </a:xfrm>
-          <a:prstGeom prst="roundRect">
-            <a:avLst>
-              <a:gd name="adj" fmla="val 28571"/>
-            </a:avLst>
-          </a:prstGeom>
-          <a:solidFill>
-            <a:srgbClr val="FFFFFF"/>
-          </a:solidFill>
-          <a:ln>
-            <a:solidFill>
-              <a:srgbClr val="A8552F"/>
-            </a:solidFill>
-          </a:ln>
-          <a:effectLst/>
-        </p:spPr>
-        <p:style>
-          <a:lnRef idx="1">
-            <a:schemeClr val="accent1"/>
-          </a:lnRef>
-          <a:fillRef idx="3">
-            <a:schemeClr val="accent1"/>
-          </a:fillRef>
-          <a:effectRef idx="2">
-            <a:schemeClr val="accent1"/>
-          </a:effectRef>
-          <a:fontRef idx="minor">
-            <a:schemeClr val="lt1"/>
-          </a:fontRef>
-        </p:style>
-        <p:txBody>
-          <a:bodyPr rtlCol="0" anchor="ctr"/>
-          <a:lstStyle/>
-          <a:p>
-            <a:pPr algn="ctr"/>
-            <a:r>
-              <a:rPr sz="1200" b="1">
-                <a:solidFill>
-                  <a:srgbClr val="A8552F"/>
-                </a:solidFill>
-                <a:latin typeface="맑은 고딕"/>
-              </a:rPr>
-              <a:t>기각</a:t>
-            </a:r>
-          </a:p>
-        </p:txBody>
-      </p:sp>
-      <p:sp>
-        <p:nvSpPr>
-          <p:cNvPr id="19" name="TextBox 18"/>
-          <p:cNvSpPr txBox="1"/>
-          <p:nvPr/>
-        </p:nvSpPr>
-        <p:spPr>
-          <a:xfrm>
-            <a:off x="2286000" y="4443984"/>
-            <a:ext cx="9326880" cy="411480"/>
-          </a:xfrm>
-          <a:prstGeom prst="rect">
-            <a:avLst/>
-          </a:prstGeom>
-          <a:noFill/>
-        </p:spPr>
-        <p:txBody>
-          <a:bodyPr wrap="square" anchor="t">
-            <a:spAutoFit/>
-          </a:bodyPr>
-          <a:lstStyle/>
-          <a:p>
-            <a:pPr algn="l">
-              <a:lnSpc>
-                <a:spcPct val="120000"/>
-              </a:lnSpc>
-            </a:pPr>
-            <a:r>
-              <a:rPr sz="1600" b="1">
-                <a:solidFill>
-                  <a:srgbClr val="1D1F23"/>
-                </a:solidFill>
-                <a:latin typeface="맑은 고딕"/>
-              </a:rPr>
-              <a:t>가설 B: 강남은 지하철·지하상가가 방어</a:t>
-            </a:r>
-          </a:p>
-        </p:txBody>
-      </p:sp>
-      <p:sp>
-        <p:nvSpPr>
-          <p:cNvPr id="20" name="TextBox 19"/>
-          <p:cNvSpPr txBox="1"/>
-          <p:nvPr/>
-        </p:nvSpPr>
-        <p:spPr>
-          <a:xfrm>
-            <a:off x="2286000" y="4855464"/>
-            <a:ext cx="9326880" cy="457200"/>
-          </a:xfrm>
-          <a:prstGeom prst="rect">
-            <a:avLst/>
-          </a:prstGeom>
-          <a:noFill/>
-        </p:spPr>
-        <p:txBody>
-          <a:bodyPr wrap="square" anchor="t">
-            <a:spAutoFit/>
-          </a:bodyPr>
-          <a:lstStyle/>
-          <a:p>
-            <a:pPr algn="l">
-              <a:lnSpc>
-                <a:spcPct val="120000"/>
-              </a:lnSpc>
-            </a:pPr>
-            <a:r>
-              <a:rPr sz="1300" b="0">
-                <a:solidFill>
-                  <a:srgbClr val="646A73"/>
-                </a:solidFill>
-                <a:latin typeface="맑은 고딕"/>
-              </a:rPr>
-              <a:t>두 지역 차이를 상호작용항으로 직접 검정 → p = 0.40, 지역 간 비교 주장은 하지 않음</a:t>
-            </a:r>
-          </a:p>
-        </p:txBody>
-      </p:sp>
-      <p:sp>
-        <p:nvSpPr>
-          <p:cNvPr id="21" name="Oval 20"/>
-          <p:cNvSpPr/>
-          <p:nvPr/>
-        </p:nvSpPr>
-        <p:spPr>
-          <a:xfrm>
-            <a:off x="640080" y="5422392"/>
-            <a:ext cx="457200" cy="457200"/>
-          </a:xfrm>
-          <a:prstGeom prst="ellipse">
-            <a:avLst/>
-          </a:prstGeom>
-          <a:solidFill>
-            <a:srgbClr val="1D1F23"/>
-          </a:solidFill>
-          <a:ln>
-            <a:noFill/>
-          </a:ln>
-          <a:effectLst/>
-        </p:spPr>
-        <p:style>
-          <a:lnRef idx="1">
-            <a:schemeClr val="accent1"/>
-          </a:lnRef>
-          <a:fillRef idx="3">
-            <a:schemeClr val="accent1"/>
-          </a:fillRef>
-          <a:effectRef idx="2">
-            <a:schemeClr val="accent1"/>
-          </a:effectRef>
-          <a:fontRef idx="minor">
-            <a:schemeClr val="lt1"/>
-          </a:fontRef>
-        </p:style>
-        <p:txBody>
-          <a:bodyPr rtlCol="0" anchor="ctr"/>
-          <a:lstStyle/>
-          <a:p>
-            <a:pPr algn="ctr"/>
-            <a:r>
-              <a:rPr sz="1400" b="1">
-                <a:solidFill>
-                  <a:srgbClr val="FFFFFF"/>
-                </a:solidFill>
-                <a:latin typeface="맑은 고딕"/>
-              </a:rPr>
-              <a:t>5</a:t>
-            </a:r>
-          </a:p>
-        </p:txBody>
-      </p:sp>
-      <p:sp>
-        <p:nvSpPr>
-          <p:cNvPr id="22" name="Rounded Rectangle 21"/>
-          <p:cNvSpPr/>
-          <p:nvPr/>
-        </p:nvSpPr>
-        <p:spPr>
-          <a:xfrm>
-            <a:off x="1371600" y="5449824"/>
-            <a:ext cx="731520" cy="384048"/>
-          </a:xfrm>
-          <a:prstGeom prst="roundRect">
-            <a:avLst>
-              <a:gd name="adj" fmla="val 28571"/>
-            </a:avLst>
-          </a:prstGeom>
-          <a:solidFill>
-            <a:srgbClr val="FFFFFF"/>
-          </a:solidFill>
-          <a:ln>
-            <a:solidFill>
-              <a:srgbClr val="2F7D5B"/>
-            </a:solidFill>
-          </a:ln>
-          <a:effectLst/>
-        </p:spPr>
-        <p:style>
-          <a:lnRef idx="1">
-            <a:schemeClr val="accent1"/>
-          </a:lnRef>
-          <a:fillRef idx="3">
-            <a:schemeClr val="accent1"/>
-          </a:fillRef>
-          <a:effectRef idx="2">
-            <a:schemeClr val="accent1"/>
-          </a:effectRef>
-          <a:fontRef idx="minor">
-            <a:schemeClr val="lt1"/>
-          </a:fontRef>
-        </p:style>
-        <p:txBody>
-          <a:bodyPr rtlCol="0" anchor="ctr"/>
-          <a:lstStyle/>
-          <a:p>
-            <a:pPr algn="ctr"/>
-            <a:r>
-              <a:rPr sz="1200" b="1">
-                <a:solidFill>
-                  <a:srgbClr val="2F7D5B"/>
-                </a:solidFill>
-                <a:latin typeface="맑은 고딕"/>
-              </a:rPr>
-              <a:t>채택</a:t>
-            </a:r>
-          </a:p>
-        </p:txBody>
-      </p:sp>
-      <p:sp>
-        <p:nvSpPr>
-          <p:cNvPr id="23" name="TextBox 22"/>
-          <p:cNvSpPr txBox="1"/>
-          <p:nvPr/>
-        </p:nvSpPr>
-        <p:spPr>
-          <a:xfrm>
-            <a:off x="2286000" y="5376672"/>
-            <a:ext cx="9326880" cy="411480"/>
-          </a:xfrm>
-          <a:prstGeom prst="rect">
-            <a:avLst/>
-          </a:prstGeom>
-          <a:noFill/>
-        </p:spPr>
-        <p:txBody>
-          <a:bodyPr wrap="square" anchor="t">
-            <a:spAutoFit/>
-          </a:bodyPr>
-          <a:lstStyle/>
-          <a:p>
-            <a:pPr algn="l">
-              <a:lnSpc>
-                <a:spcPct val="120000"/>
-              </a:lnSpc>
-            </a:pPr>
-            <a:r>
-              <a:rPr sz="1600" b="1">
-                <a:solidFill>
-                  <a:srgbClr val="1D1F23"/>
-                </a:solidFill>
-                <a:latin typeface="맑은 고딕"/>
-              </a:rPr>
-              <a:t>최종: 범위는 좁게, 근거는 단단하게</a:t>
-            </a:r>
-          </a:p>
-        </p:txBody>
-      </p:sp>
-      <p:sp>
-        <p:nvSpPr>
-          <p:cNvPr id="24" name="TextBox 23"/>
-          <p:cNvSpPr txBox="1"/>
-          <p:nvPr/>
-        </p:nvSpPr>
-        <p:spPr>
-          <a:xfrm>
-            <a:off x="2286000" y="5788152"/>
-            <a:ext cx="9326880" cy="457200"/>
-          </a:xfrm>
-          <a:prstGeom prst="rect">
-            <a:avLst/>
-          </a:prstGeom>
-          <a:noFill/>
-        </p:spPr>
-        <p:txBody>
-          <a:bodyPr wrap="square" anchor="t">
-            <a:spAutoFit/>
-          </a:bodyPr>
-          <a:lstStyle/>
-          <a:p>
-            <a:pPr algn="l">
-              <a:lnSpc>
-                <a:spcPct val="120000"/>
-              </a:lnSpc>
-            </a:pPr>
-            <a:r>
-              <a:rPr sz="1300" b="0">
-                <a:solidFill>
-                  <a:srgbClr val="646A73"/>
-                </a:solidFill>
-                <a:latin typeface="맑은 고딕"/>
-              </a:rPr>
-              <a:t>춘천 안에서 방문객 vs 지역주민 차이(신뢰구간 겹치지 않음) → '외지 방문객 매출 비중'을 취약도 지표로 제안</a:t>
+            <a:off x="6355080" y="2743200"/>
+            <a:ext cx="5029200" cy="2926080"/>
+          </a:xfrm>
+          <a:prstGeom prst="rect">
+            <a:avLst/>
+          </a:prstGeom>
+          <a:noFill/>
+        </p:spPr>
+        <p:txBody>
+          <a:bodyPr wrap="none">
+            <a:spAutoFit/>
+          </a:bodyPr>
+          <a:lstStyle/>
+          <a:p>
+            <a:pPr>
+              <a:lnSpc>
+                <a:spcPct val="110000"/>
+              </a:lnSpc>
+            </a:pPr>
+            <a:r>
+              <a:rPr sz="1150">
+                <a:solidFill>
+                  <a:srgbClr val="8FBC8F"/>
+                </a:solidFill>
+                <a:latin typeface="Consolas"/>
+              </a:rPr>
+              <a:t># scripts/build_merged_daily.py</a:t>
+            </a:r>
+          </a:p>
+          <a:p>
+            <a:pPr>
+              <a:lnSpc>
+                <a:spcPct val="110000"/>
+              </a:lnSpc>
+            </a:pPr>
+            <a:r>
+              <a:rPr sz="1150">
+                <a:solidFill>
+                  <a:srgbClr val="E6E6E6"/>
+                </a:solidFill>
+                <a:latin typeface="Consolas"/>
+              </a:rPr>
+              <a:t>w['date'] = (w['dt'] - pd.Timedelta(hours=1)).dt.normalize()</a:t>
+            </a:r>
+          </a:p>
+          <a:p>
+            <a:pPr>
+              <a:lnSpc>
+                <a:spcPct val="110000"/>
+              </a:lnSpc>
+            </a:pPr>
+            <a:r>
+              <a:rPr sz="1150">
+                <a:solidFill>
+                  <a:srgbClr val="E6E6E6"/>
+                </a:solidFill>
+                <a:latin typeface="Consolas"/>
+              </a:rPr>
+              <a:t>weather['heavy_rain_day'] = weather['precip_sum'] &gt;= 30</a:t>
+            </a:r>
+          </a:p>
+          <a:p>
+            <a:pPr>
+              <a:lnSpc>
+                <a:spcPct val="110000"/>
+              </a:lnSpc>
+            </a:pPr>
+            <a:r>
+              <a:rPr sz="1150">
+                <a:solidFill>
+                  <a:srgbClr val="E6E6E6"/>
+                </a:solidFill>
+                <a:latin typeface="Consolas"/>
+              </a:rPr>
+              <a:t> </a:t>
+            </a:r>
+          </a:p>
+          <a:p>
+            <a:pPr>
+              <a:lnSpc>
+                <a:spcPct val="110000"/>
+              </a:lnSpc>
+            </a:pPr>
+            <a:r>
+              <a:rPr sz="1150">
+                <a:solidFill>
+                  <a:srgbClr val="8FBC8F"/>
+                </a:solidFill>
+                <a:latin typeface="Consolas"/>
+              </a:rPr>
+              <a:t># scripts/aggregate_shinhan_daily_region.py</a:t>
+            </a:r>
+          </a:p>
+          <a:p>
+            <a:pPr>
+              <a:lnSpc>
+                <a:spcPct val="110000"/>
+              </a:lnSpc>
+            </a:pPr>
+            <a:r>
+              <a:rPr sz="1150">
+                <a:solidFill>
+                  <a:srgbClr val="E6E6E6"/>
+                </a:solidFill>
+                <a:latin typeface="Consolas"/>
+              </a:rPr>
+              <a:t>CORE_EXCLUDE = ['세금공과금', 'ZZ_나머지']   # 금액의 50%</a:t>
+            </a:r>
+          </a:p>
+          <a:p>
+            <a:pPr>
+              <a:lnSpc>
+                <a:spcPct val="110000"/>
+              </a:lnSpc>
+            </a:pPr>
+            <a:r>
+              <a:rPr sz="1150">
+                <a:solidFill>
+                  <a:srgbClr val="E6E6E6"/>
+                </a:solidFill>
+                <a:latin typeface="Consolas"/>
+              </a:rPr>
+              <a:t>core = df2[~df2['MCT_RY_CD'].isin(CORE_EXCLUDE)]</a:t>
+            </a:r>
+          </a:p>
+          <a:p>
+            <a:pPr>
+              <a:lnSpc>
+                <a:spcPct val="110000"/>
+              </a:lnSpc>
+            </a:pPr>
+            <a:r>
+              <a:rPr sz="1150">
+                <a:solidFill>
+                  <a:srgbClr val="E6E6E6"/>
+                </a:solidFill>
+                <a:latin typeface="Consolas"/>
+              </a:rPr>
+              <a:t> </a:t>
+            </a:r>
+          </a:p>
+          <a:p>
+            <a:pPr>
+              <a:lnSpc>
+                <a:spcPct val="110000"/>
+              </a:lnSpc>
+            </a:pPr>
+            <a:r>
+              <a:rPr sz="1150">
+                <a:solidFill>
+                  <a:srgbClr val="8FBC8F"/>
+                </a:solidFill>
+                <a:latin typeface="Consolas"/>
+              </a:rPr>
+              <a:t># 가맹점 시도 != 고객 거주 시도 → 타 시도 방문객</a:t>
+            </a:r>
+          </a:p>
+          <a:p>
+            <a:pPr>
+              <a:lnSpc>
+                <a:spcPct val="110000"/>
+              </a:lnSpc>
+            </a:pPr>
+            <a:r>
+              <a:rPr sz="1150">
+                <a:solidFill>
+                  <a:srgbClr val="E6E6E6"/>
+                </a:solidFill>
+                <a:latin typeface="Consolas"/>
+              </a:rPr>
+              <a:t>core['visitor'] = (core['MCT_SGG_CD'].str.split(' ').str[0]</a:t>
+            </a:r>
+          </a:p>
+          <a:p>
+            <a:pPr>
+              <a:lnSpc>
+                <a:spcPct val="110000"/>
+              </a:lnSpc>
+            </a:pPr>
+            <a:r>
+              <a:rPr sz="1150">
+                <a:solidFill>
+                  <a:srgbClr val="E6E6E6"/>
+                </a:solidFill>
+                <a:latin typeface="Consolas"/>
+              </a:rPr>
+              <a:t>                   != core['CLN_SGG_CD'])</a:t>
             </a:r>
           </a:p>
         </p:txBody>
@@ -7917,7 +8619,7 @@
                 </a:solidFill>
                 <a:latin typeface="맑은 고딕"/>
               </a:rPr>
-              <a:t>RESULT ①</a:t>
+              <a:t>CODE ②  ·  MODEL &amp; TESTS</a:t>
             </a:r>
           </a:p>
         </p:txBody>
@@ -7956,7 +8658,7 @@
                 </a:solidFill>
                 <a:latin typeface="맑은 고딕"/>
               </a:rPr>
-              <a:t>지역 전체로 보면, 결론이 애매하다</a:t>
+              <a:t>핵심 코드 — 모든 검정이 공유하는 회귀 함수</a:t>
             </a:r>
           </a:p>
         </p:txBody>
@@ -8000,30 +8702,45 @@
           </a:p>
         </p:txBody>
       </p:sp>
-      <p:pic>
-        <p:nvPicPr>
-          <p:cNvPr id="5" name="Picture 4" descr="pt_01_region_overview.png"/>
-          <p:cNvPicPr>
-            <a:picLocks noChangeAspect="1"/>
-          </p:cNvPicPr>
-          <p:nvPr/>
-        </p:nvPicPr>
-        <p:blipFill>
-          <a:blip r:embed="rId2"/>
-          <a:stretch>
-            <a:fillRect/>
-          </a:stretch>
-        </p:blipFill>
+      <p:sp>
+        <p:nvSpPr>
+          <p:cNvPr id="5" name="TextBox 4"/>
+          <p:cNvSpPr txBox="1"/>
+          <p:nvPr/>
+        </p:nvSpPr>
         <p:spPr>
           <a:xfrm>
             <a:off x="640080" y="1600200"/>
-            <a:ext cx="6339840" cy="4754880"/>
-          </a:xfrm>
-          <a:prstGeom prst="rect">
-            <a:avLst/>
-          </a:prstGeom>
-        </p:spPr>
-      </p:pic>
+            <a:ext cx="5349240" cy="365760"/>
+          </a:xfrm>
+          <a:prstGeom prst="rect">
+            <a:avLst/>
+          </a:prstGeom>
+          <a:noFill/>
+        </p:spPr>
+        <p:txBody>
+          <a:bodyPr wrap="square" anchor="t">
+            <a:spAutoFit/>
+          </a:bodyPr>
+          <a:lstStyle/>
+          <a:p>
+            <a:pPr algn="l">
+              <a:lnSpc>
+                <a:spcPct val="120000"/>
+              </a:lnSpc>
+            </a:pPr>
+            <a:r>
+              <a:rPr sz="1500" b="1">
+                <a:solidFill>
+                  <a:srgbClr val="3B6FA0"/>
+                </a:solidFill>
+                <a:latin typeface="맑은 고딕"/>
+              </a:rPr>
+              <a:t>로그선형 회귀 + HAC 표준오차</a:t>
+            </a:r>
+          </a:p>
+        </p:txBody>
+      </p:sp>
       <p:sp>
         <p:nvSpPr>
           <p:cNvPr id="6" name="TextBox 5"/>
@@ -8032,159 +8749,601 @@
         </p:nvSpPr>
         <p:spPr>
           <a:xfrm>
-            <a:off x="7223760" y="2011680"/>
-            <a:ext cx="4389120" cy="4114800"/>
-          </a:xfrm>
-          <a:prstGeom prst="rect">
-            <a:avLst/>
-          </a:prstGeom>
-          <a:noFill/>
-        </p:spPr>
-        <p:txBody>
-          <a:bodyPr wrap="square" anchor="t">
-            <a:spAutoFit/>
-          </a:bodyPr>
-          <a:lstStyle/>
-          <a:p>
-            <a:pPr algn="l">
-              <a:lnSpc>
-                <a:spcPct val="135000"/>
+            <a:off x="640080" y="1965960"/>
+            <a:ext cx="5349240" cy="548640"/>
+          </a:xfrm>
+          <a:prstGeom prst="rect">
+            <a:avLst/>
+          </a:prstGeom>
+          <a:noFill/>
+        </p:spPr>
+        <p:txBody>
+          <a:bodyPr wrap="square" anchor="t">
+            <a:spAutoFit/>
+          </a:bodyPr>
+          <a:lstStyle/>
+          <a:p>
+            <a:pPr algn="l">
+              <a:lnSpc>
+                <a:spcPct val="120000"/>
+              </a:lnSpc>
+            </a:pPr>
+            <a:r>
+              <a:rPr sz="1200" b="0">
+                <a:solidFill>
+                  <a:srgbClr val="646A73"/>
+                </a:solidFill>
+                <a:latin typeface="맑은 고딕"/>
+              </a:rPr>
+              <a:t>월·요일 더미로 계절·요일 효과를 통제하고, 비의 자기상관은 HAC(3일)로 보정</a:t>
+            </a:r>
+          </a:p>
+        </p:txBody>
+      </p:sp>
+      <p:sp>
+        <p:nvSpPr>
+          <p:cNvPr id="7" name="Rounded Rectangle 6"/>
+          <p:cNvSpPr/>
+          <p:nvPr/>
+        </p:nvSpPr>
+        <p:spPr>
+          <a:xfrm>
+            <a:off x="640080" y="2606040"/>
+            <a:ext cx="5349240" cy="3108960"/>
+          </a:xfrm>
+          <a:prstGeom prst="roundRect">
+            <a:avLst>
+              <a:gd name="adj" fmla="val 3529"/>
+            </a:avLst>
+          </a:prstGeom>
+          <a:solidFill>
+            <a:srgbClr val="1F232A"/>
+          </a:solidFill>
+          <a:ln>
+            <a:noFill/>
+          </a:ln>
+          <a:effectLst/>
+        </p:spPr>
+        <p:style>
+          <a:lnRef idx="1">
+            <a:schemeClr val="accent1"/>
+          </a:lnRef>
+          <a:fillRef idx="3">
+            <a:schemeClr val="accent1"/>
+          </a:fillRef>
+          <a:effectRef idx="2">
+            <a:schemeClr val="accent1"/>
+          </a:effectRef>
+          <a:fontRef idx="minor">
+            <a:schemeClr val="lt1"/>
+          </a:fontRef>
+        </p:style>
+        <p:txBody>
+          <a:bodyPr rtlCol="0" anchor="ctr"/>
+          <a:lstStyle/>
+          <a:p>
+            <a:pPr algn="ctr"/>
+          </a:p>
+        </p:txBody>
+      </p:sp>
+      <p:sp>
+        <p:nvSpPr>
+          <p:cNvPr id="8" name="TextBox 7"/>
+          <p:cNvSpPr txBox="1"/>
+          <p:nvPr/>
+        </p:nvSpPr>
+        <p:spPr>
+          <a:xfrm>
+            <a:off x="822959" y="2743200"/>
+            <a:ext cx="5029200" cy="2926080"/>
+          </a:xfrm>
+          <a:prstGeom prst="rect">
+            <a:avLst/>
+          </a:prstGeom>
+          <a:noFill/>
+        </p:spPr>
+        <p:txBody>
+          <a:bodyPr wrap="none">
+            <a:spAutoFit/>
+          </a:bodyPr>
+          <a:lstStyle/>
+          <a:p>
+            <a:pPr>
+              <a:lnSpc>
+                <a:spcPct val="110000"/>
+              </a:lnSpc>
+            </a:pPr>
+            <a:r>
+              <a:rPr sz="1150">
+                <a:solidFill>
+                  <a:srgbClr val="8FBC8F"/>
+                </a:solidFill>
+                <a:latin typeface="Consolas"/>
+              </a:rPr>
+              <a:t># scripts/common.py</a:t>
+            </a:r>
+          </a:p>
+          <a:p>
+            <a:pPr>
+              <a:lnSpc>
+                <a:spcPct val="110000"/>
+              </a:lnSpc>
+            </a:pPr>
+            <a:r>
+              <a:rPr sz="1150">
+                <a:solidFill>
+                  <a:srgbClr val="E6E6E6"/>
+                </a:solidFill>
+                <a:latin typeface="Consolas"/>
+              </a:rPr>
+              <a:t>def fit_hac(g, y, terms):</a:t>
+            </a:r>
+          </a:p>
+          <a:p>
+            <a:pPr>
+              <a:lnSpc>
+                <a:spcPct val="110000"/>
+              </a:lnSpc>
+            </a:pPr>
+            <a:r>
+              <a:rPr sz="1150">
+                <a:solidFill>
+                  <a:srgbClr val="E6E6E6"/>
+                </a:solidFill>
+                <a:latin typeface="Consolas"/>
+              </a:rPr>
+              <a:t>    X = pd.get_dummies(g[['month', 'weekday']].astype(str),</a:t>
+            </a:r>
+          </a:p>
+          <a:p>
+            <a:pPr>
+              <a:lnSpc>
+                <a:spcPct val="110000"/>
+              </a:lnSpc>
+            </a:pPr>
+            <a:r>
+              <a:rPr sz="1150">
+                <a:solidFill>
+                  <a:srgbClr val="E6E6E6"/>
+                </a:solidFill>
+                <a:latin typeface="Consolas"/>
+              </a:rPr>
+              <a:t>                       drop_first=True, dtype=float)</a:t>
+            </a:r>
+          </a:p>
+          <a:p>
+            <a:pPr>
+              <a:lnSpc>
+                <a:spcPct val="110000"/>
+              </a:lnSpc>
+            </a:pPr>
+            <a:r>
+              <a:rPr sz="1150">
+                <a:solidFill>
+                  <a:srgbClr val="E6E6E6"/>
+                </a:solidFill>
+                <a:latin typeface="Consolas"/>
+              </a:rPr>
+              <a:t>    for c in terms:</a:t>
+            </a:r>
+          </a:p>
+          <a:p>
+            <a:pPr>
+              <a:lnSpc>
+                <a:spcPct val="110000"/>
+              </a:lnSpc>
+            </a:pPr>
+            <a:r>
+              <a:rPr sz="1150">
+                <a:solidFill>
+                  <a:srgbClr val="E6E6E6"/>
+                </a:solidFill>
+                <a:latin typeface="Consolas"/>
+              </a:rPr>
+              <a:t>        X[c] = g[c].astype(float)</a:t>
+            </a:r>
+          </a:p>
+          <a:p>
+            <a:pPr>
+              <a:lnSpc>
+                <a:spcPct val="110000"/>
+              </a:lnSpc>
+            </a:pPr>
+            <a:r>
+              <a:rPr sz="1150">
+                <a:solidFill>
+                  <a:srgbClr val="E6E6E6"/>
+                </a:solidFill>
+                <a:latin typeface="Consolas"/>
+              </a:rPr>
+              <a:t>    X = sm.add_constant(X).loc[y.index]</a:t>
+            </a:r>
+          </a:p>
+          <a:p>
+            <a:pPr>
+              <a:lnSpc>
+                <a:spcPct val="110000"/>
+              </a:lnSpc>
+            </a:pPr>
+            <a:r>
+              <a:rPr sz="1150">
+                <a:solidFill>
+                  <a:srgbClr val="E6E6E6"/>
+                </a:solidFill>
+                <a:latin typeface="Consolas"/>
+              </a:rPr>
+              <a:t>    return sm.OLS(y, X).fit(cov_type='HAC',</a:t>
+            </a:r>
+          </a:p>
+          <a:p>
+            <a:pPr>
+              <a:lnSpc>
+                <a:spcPct val="110000"/>
+              </a:lnSpc>
+            </a:pPr>
+            <a:r>
+              <a:rPr sz="1150">
+                <a:solidFill>
+                  <a:srgbClr val="E6E6E6"/>
+                </a:solidFill>
+                <a:latin typeface="Consolas"/>
+              </a:rPr>
+              <a:t>                            cov_kwds={'maxlags': 3})</a:t>
+            </a:r>
+          </a:p>
+          <a:p>
+            <a:pPr>
+              <a:lnSpc>
+                <a:spcPct val="110000"/>
+              </a:lnSpc>
+            </a:pPr>
+            <a:r>
+              <a:rPr sz="1150">
+                <a:solidFill>
+                  <a:srgbClr val="E6E6E6"/>
+                </a:solidFill>
+                <a:latin typeface="Consolas"/>
+              </a:rPr>
+              <a:t> </a:t>
+            </a:r>
+          </a:p>
+          <a:p>
+            <a:pPr>
+              <a:lnSpc>
+                <a:spcPct val="110000"/>
+              </a:lnSpc>
+            </a:pPr>
+            <a:r>
+              <a:rPr sz="1150">
+                <a:solidFill>
+                  <a:srgbClr val="8FBC8F"/>
+                </a:solidFill>
+                <a:latin typeface="Consolas"/>
+              </a:rPr>
+              <a:t># 로그 계수 → 변화율(%)</a:t>
+            </a:r>
+          </a:p>
+          <a:p>
+            <a:pPr>
+              <a:lnSpc>
+                <a:spcPct val="110000"/>
+              </a:lnSpc>
+            </a:pPr>
+            <a:r>
+              <a:rPr sz="1150">
+                <a:solidFill>
+                  <a:srgbClr val="E6E6E6"/>
+                </a:solidFill>
+                <a:latin typeface="Consolas"/>
+              </a:rPr>
+              <a:t>to_pct = lambda b: (np.exp(b) - 1) * 100</a:t>
+            </a:r>
+          </a:p>
+        </p:txBody>
+      </p:sp>
+      <p:sp>
+        <p:nvSpPr>
+          <p:cNvPr id="9" name="TextBox 8"/>
+          <p:cNvSpPr txBox="1"/>
+          <p:nvPr/>
+        </p:nvSpPr>
+        <p:spPr>
+          <a:xfrm>
+            <a:off x="6172200" y="1600200"/>
+            <a:ext cx="5349240" cy="365760"/>
+          </a:xfrm>
+          <a:prstGeom prst="rect">
+            <a:avLst/>
+          </a:prstGeom>
+          <a:noFill/>
+        </p:spPr>
+        <p:txBody>
+          <a:bodyPr wrap="square" anchor="t">
+            <a:spAutoFit/>
+          </a:bodyPr>
+          <a:lstStyle/>
+          <a:p>
+            <a:pPr algn="l">
+              <a:lnSpc>
+                <a:spcPct val="120000"/>
               </a:lnSpc>
             </a:pPr>
             <a:r>
               <a:rPr sz="1500" b="1">
                 <a:solidFill>
-                  <a:srgbClr val="1D1F23"/>
-                </a:solidFill>
-                <a:latin typeface="맑은 고딕"/>
-              </a:rPr>
-              <a:t>호우일 핵심 소비 변화</a:t>
-            </a:r>
-          </a:p>
-          <a:p>
-            <a:pPr algn="l">
-              <a:lnSpc>
-                <a:spcPct val="135000"/>
-              </a:lnSpc>
-            </a:pPr>
-            <a:r>
-              <a:rPr sz="1500" b="0">
-                <a:solidFill>
-                  <a:srgbClr val="1D1F23"/>
-                </a:solidFill>
-                <a:latin typeface="맑은 고딕"/>
-              </a:rPr>
-              <a:t>· 강남 −11.0%  (p = 0.069)</a:t>
-            </a:r>
-          </a:p>
-          <a:p>
-            <a:pPr algn="l">
-              <a:lnSpc>
-                <a:spcPct val="135000"/>
-              </a:lnSpc>
-            </a:pPr>
-            <a:r>
-              <a:rPr sz="1500" b="0">
-                <a:solidFill>
-                  <a:srgbClr val="1D1F23"/>
-                </a:solidFill>
-                <a:latin typeface="맑은 고딕"/>
-              </a:rPr>
-              <a:t>   95% 신뢰구간이 0을 포함 → 불확실</a:t>
-            </a:r>
-          </a:p>
-          <a:p>
-            <a:pPr algn="l">
-              <a:lnSpc>
-                <a:spcPct val="135000"/>
-              </a:lnSpc>
-            </a:pPr>
-            <a:r>
-              <a:rPr sz="1500" b="0">
-                <a:solidFill>
-                  <a:srgbClr val="1D1F23"/>
-                </a:solidFill>
-                <a:latin typeface="맑은 고딕"/>
-              </a:rPr>
-              <a:t>· 춘천 −8.6%  (p &lt; 0.001)</a:t>
-            </a:r>
-          </a:p>
-          <a:p>
-            <a:pPr algn="l">
-              <a:lnSpc>
-                <a:spcPct val="135000"/>
-              </a:lnSpc>
-            </a:pPr>
-          </a:p>
-          <a:p>
-            <a:pPr algn="l">
-              <a:lnSpc>
-                <a:spcPct val="135000"/>
-              </a:lnSpc>
-            </a:pPr>
-            <a:r>
-              <a:rPr sz="1500" b="1">
-                <a:solidFill>
-                  <a:srgbClr val="1D1F23"/>
-                </a:solidFill>
-                <a:latin typeface="맑은 고딕"/>
-              </a:rPr>
-              <a:t>두 지역 차이를 직접 검정하면</a:t>
-            </a:r>
-          </a:p>
-          <a:p>
-            <a:pPr algn="l">
-              <a:lnSpc>
-                <a:spcPct val="135000"/>
-              </a:lnSpc>
-            </a:pPr>
-            <a:r>
-              <a:rPr sz="1500" b="0">
-                <a:solidFill>
-                  <a:srgbClr val="1D1F23"/>
-                </a:solidFill>
-                <a:latin typeface="맑은 고딕"/>
-              </a:rPr>
-              <a:t>· 상호작용항 p = 0.40 → 차이 근거 없음</a:t>
-            </a:r>
-          </a:p>
-          <a:p>
-            <a:pPr algn="l">
-              <a:lnSpc>
-                <a:spcPct val="135000"/>
-              </a:lnSpc>
-            </a:pPr>
-          </a:p>
-          <a:p>
-            <a:pPr algn="l">
-              <a:lnSpc>
-                <a:spcPct val="135000"/>
-              </a:lnSpc>
-            </a:pPr>
-            <a:r>
-              <a:rPr sz="1500" b="0">
-                <a:solidFill>
-                  <a:srgbClr val="1D1F23"/>
-                </a:solidFill>
-                <a:latin typeface="맑은 고딕"/>
-              </a:rPr>
-              <a:t>→ '어느 지역이 더 취약한가'만으로는</a:t>
-            </a:r>
-          </a:p>
-          <a:p>
-            <a:pPr algn="l">
-              <a:lnSpc>
-                <a:spcPct val="135000"/>
-              </a:lnSpc>
-            </a:pPr>
-            <a:r>
-              <a:rPr sz="1500" b="0">
-                <a:solidFill>
-                  <a:srgbClr val="1D1F23"/>
-                </a:solidFill>
-                <a:latin typeface="맑은 고딕"/>
-              </a:rPr>
-              <a:t>   답할 수 없다. 고객을 나눠 봐야 한다.</a:t>
+                  <a:srgbClr val="3B6FA0"/>
+                </a:solidFill>
+                <a:latin typeface="맑은 고딕"/>
+              </a:rPr>
+              <a:t>FDR 보정 · 상호작용항</a:t>
+            </a:r>
+          </a:p>
+        </p:txBody>
+      </p:sp>
+      <p:sp>
+        <p:nvSpPr>
+          <p:cNvPr id="10" name="TextBox 9"/>
+          <p:cNvSpPr txBox="1"/>
+          <p:nvPr/>
+        </p:nvSpPr>
+        <p:spPr>
+          <a:xfrm>
+            <a:off x="6172200" y="1965960"/>
+            <a:ext cx="5349240" cy="548640"/>
+          </a:xfrm>
+          <a:prstGeom prst="rect">
+            <a:avLst/>
+          </a:prstGeom>
+          <a:noFill/>
+        </p:spPr>
+        <p:txBody>
+          <a:bodyPr wrap="square" anchor="t">
+            <a:spAutoFit/>
+          </a:bodyPr>
+          <a:lstStyle/>
+          <a:p>
+            <a:pPr algn="l">
+              <a:lnSpc>
+                <a:spcPct val="120000"/>
+              </a:lnSpc>
+            </a:pPr>
+            <a:r>
+              <a:rPr sz="1200" b="0">
+                <a:solidFill>
+                  <a:srgbClr val="646A73"/>
+                </a:solidFill>
+                <a:latin typeface="맑은 고딕"/>
+              </a:rPr>
+              <a:t>업종 145개 동시 검정은 q값으로 보정, 두 지역의 반응 '차이'는 상호작용항으로 직접 검정</a:t>
+            </a:r>
+          </a:p>
+        </p:txBody>
+      </p:sp>
+      <p:sp>
+        <p:nvSpPr>
+          <p:cNvPr id="11" name="Rounded Rectangle 10"/>
+          <p:cNvSpPr/>
+          <p:nvPr/>
+        </p:nvSpPr>
+        <p:spPr>
+          <a:xfrm>
+            <a:off x="6172200" y="2606040"/>
+            <a:ext cx="5349240" cy="3108960"/>
+          </a:xfrm>
+          <a:prstGeom prst="roundRect">
+            <a:avLst>
+              <a:gd name="adj" fmla="val 3529"/>
+            </a:avLst>
+          </a:prstGeom>
+          <a:solidFill>
+            <a:srgbClr val="1F232A"/>
+          </a:solidFill>
+          <a:ln>
+            <a:noFill/>
+          </a:ln>
+          <a:effectLst/>
+        </p:spPr>
+        <p:style>
+          <a:lnRef idx="1">
+            <a:schemeClr val="accent1"/>
+          </a:lnRef>
+          <a:fillRef idx="3">
+            <a:schemeClr val="accent1"/>
+          </a:fillRef>
+          <a:effectRef idx="2">
+            <a:schemeClr val="accent1"/>
+          </a:effectRef>
+          <a:fontRef idx="minor">
+            <a:schemeClr val="lt1"/>
+          </a:fontRef>
+        </p:style>
+        <p:txBody>
+          <a:bodyPr rtlCol="0" anchor="ctr"/>
+          <a:lstStyle/>
+          <a:p>
+            <a:pPr algn="ctr"/>
+          </a:p>
+        </p:txBody>
+      </p:sp>
+      <p:sp>
+        <p:nvSpPr>
+          <p:cNvPr id="12" name="TextBox 11"/>
+          <p:cNvSpPr txBox="1"/>
+          <p:nvPr/>
+        </p:nvSpPr>
+        <p:spPr>
+          <a:xfrm>
+            <a:off x="6355080" y="2743200"/>
+            <a:ext cx="5029200" cy="2926080"/>
+          </a:xfrm>
+          <a:prstGeom prst="rect">
+            <a:avLst/>
+          </a:prstGeom>
+          <a:noFill/>
+        </p:spPr>
+        <p:txBody>
+          <a:bodyPr wrap="none">
+            <a:spAutoFit/>
+          </a:bodyPr>
+          <a:lstStyle/>
+          <a:p>
+            <a:pPr>
+              <a:lnSpc>
+                <a:spcPct val="110000"/>
+              </a:lnSpc>
+            </a:pPr>
+            <a:r>
+              <a:rPr sz="1150">
+                <a:solidFill>
+                  <a:srgbClr val="8FBC8F"/>
+                </a:solidFill>
+                <a:latin typeface="Consolas"/>
+              </a:rPr>
+              <a:t># scripts/industry_analysis.py</a:t>
+            </a:r>
+          </a:p>
+          <a:p>
+            <a:pPr>
+              <a:lnSpc>
+                <a:spcPct val="110000"/>
+              </a:lnSpc>
+            </a:pPr>
+            <a:r>
+              <a:rPr sz="1150">
+                <a:solidFill>
+                  <a:srgbClr val="E6E6E6"/>
+                </a:solidFill>
+                <a:latin typeface="Consolas"/>
+              </a:rPr>
+              <a:t>res.loc[idx, 'rain_heavy_q'] = multipletests(</a:t>
+            </a:r>
+          </a:p>
+          <a:p>
+            <a:pPr>
+              <a:lnSpc>
+                <a:spcPct val="110000"/>
+              </a:lnSpc>
+            </a:pPr>
+            <a:r>
+              <a:rPr sz="1150">
+                <a:solidFill>
+                  <a:srgbClr val="E6E6E6"/>
+                </a:solidFill>
+                <a:latin typeface="Consolas"/>
+              </a:rPr>
+              <a:t>    res.loc[idx, 'rain_heavy_p'], method='fdr_bh')[1]</a:t>
+            </a:r>
+          </a:p>
+          <a:p>
+            <a:pPr>
+              <a:lnSpc>
+                <a:spcPct val="110000"/>
+              </a:lnSpc>
+            </a:pPr>
+            <a:r>
+              <a:rPr sz="1150">
+                <a:solidFill>
+                  <a:srgbClr val="E6E6E6"/>
+                </a:solidFill>
+                <a:latin typeface="Consolas"/>
+              </a:rPr>
+              <a:t> </a:t>
+            </a:r>
+          </a:p>
+          <a:p>
+            <a:pPr>
+              <a:lnSpc>
+                <a:spcPct val="110000"/>
+              </a:lnSpc>
+            </a:pPr>
+            <a:r>
+              <a:rPr sz="1150">
+                <a:solidFill>
+                  <a:srgbClr val="8FBC8F"/>
+                </a:solidFill>
+                <a:latin typeface="Consolas"/>
+              </a:rPr>
+              <a:t># scripts/region_interaction_test.py  (기준 = 강남)</a:t>
+            </a:r>
+          </a:p>
+          <a:p>
+            <a:pPr>
+              <a:lnSpc>
+                <a:spcPct val="110000"/>
+              </a:lnSpc>
+            </a:pPr>
+            <a:r>
+              <a:rPr sz="1150">
+                <a:solidFill>
+                  <a:srgbClr val="E6E6E6"/>
+                </a:solidFill>
+                <a:latin typeface="Consolas"/>
+              </a:rPr>
+              <a:t>m['region_cc'] = (m['region'] == '강원 춘천시').astype(float)</a:t>
+            </a:r>
+          </a:p>
+          <a:p>
+            <a:pPr>
+              <a:lnSpc>
+                <a:spcPct val="110000"/>
+              </a:lnSpc>
+            </a:pPr>
+            <a:r>
+              <a:rPr sz="1150">
+                <a:solidFill>
+                  <a:srgbClr val="E6E6E6"/>
+                </a:solidFill>
+                <a:latin typeface="Consolas"/>
+              </a:rPr>
+              <a:t>for t in ['rain_light', 'rain_heavy', 'heat_day']:</a:t>
+            </a:r>
+          </a:p>
+          <a:p>
+            <a:pPr>
+              <a:lnSpc>
+                <a:spcPct val="110000"/>
+              </a:lnSpc>
+            </a:pPr>
+            <a:r>
+              <a:rPr sz="1150">
+                <a:solidFill>
+                  <a:srgbClr val="E6E6E6"/>
+                </a:solidFill>
+                <a:latin typeface="Consolas"/>
+              </a:rPr>
+              <a:t>    m[f'region_cc_x_{t}'] = m['region_cc'] * m[t]</a:t>
+            </a:r>
+          </a:p>
+          <a:p>
+            <a:pPr>
+              <a:lnSpc>
+                <a:spcPct val="110000"/>
+              </a:lnSpc>
+            </a:pPr>
+            <a:r>
+              <a:rPr sz="1150">
+                <a:solidFill>
+                  <a:srgbClr val="E6E6E6"/>
+                </a:solidFill>
+                <a:latin typeface="Consolas"/>
+              </a:rPr>
+              <a:t>res = fit_hac(m, np.log(m['s2c_amt']), terms)</a:t>
+            </a:r>
+          </a:p>
+          <a:p>
+            <a:pPr>
+              <a:lnSpc>
+                <a:spcPct val="110000"/>
+              </a:lnSpc>
+            </a:pPr>
+            <a:r>
+              <a:rPr sz="1150">
+                <a:solidFill>
+                  <a:srgbClr val="8FBC8F"/>
+                </a:solidFill>
+                <a:latin typeface="Consolas"/>
+              </a:rPr>
+              <a:t># → region_cc_x_rain_heavy: +5.7%, p = 0.399</a:t>
             </a:r>
           </a:p>
         </p:txBody>
@@ -8249,7 +9408,7 @@
                 </a:solidFill>
                 <a:latin typeface="맑은 고딕"/>
               </a:rPr>
-              <a:t>RESULT ②  ·  핵심 발견</a:t>
+              <a:t>PROCESS</a:t>
             </a:r>
           </a:p>
         </p:txBody>
@@ -8288,7 +9447,7 @@
                 </a:solidFill>
                 <a:latin typeface="맑은 고딕"/>
               </a:rPr>
-              <a:t>고객 구성으로 나누면, 뚜렷하다</a:t>
+              <a:t>가설을 세우고, 틀리면 좁혔다</a:t>
             </a:r>
           </a:p>
         </p:txBody>
@@ -8332,191 +9491,942 @@
           </a:p>
         </p:txBody>
       </p:sp>
-      <p:pic>
-        <p:nvPicPr>
-          <p:cNvPr id="5" name="Picture 4" descr="pt_02_visitor_local_main.png"/>
-          <p:cNvPicPr>
-            <a:picLocks noChangeAspect="1"/>
-          </p:cNvPicPr>
-          <p:nvPr/>
-        </p:nvPicPr>
-        <p:blipFill>
-          <a:blip r:embed="rId2"/>
-          <a:stretch>
-            <a:fillRect/>
-          </a:stretch>
-        </p:blipFill>
-        <p:spPr>
-          <a:xfrm>
-            <a:off x="457200" y="1600200"/>
-            <a:ext cx="6858000" cy="4572000"/>
-          </a:xfrm>
-          <a:prstGeom prst="rect">
-            <a:avLst/>
-          </a:prstGeom>
-        </p:spPr>
-      </p:pic>
-      <p:sp>
-        <p:nvSpPr>
-          <p:cNvPr id="6" name="TextBox 5"/>
-          <p:cNvSpPr txBox="1"/>
-          <p:nvPr/>
-        </p:nvSpPr>
-        <p:spPr>
-          <a:xfrm>
-            <a:off x="7498079" y="2011680"/>
-            <a:ext cx="4206240" cy="4206240"/>
-          </a:xfrm>
-          <a:prstGeom prst="rect">
-            <a:avLst/>
-          </a:prstGeom>
-          <a:noFill/>
-        </p:spPr>
-        <p:txBody>
-          <a:bodyPr wrap="square" anchor="t">
-            <a:spAutoFit/>
-          </a:bodyPr>
-          <a:lstStyle/>
-          <a:p>
-            <a:pPr algn="l">
-              <a:lnSpc>
-                <a:spcPct val="135000"/>
-              </a:lnSpc>
-            </a:pPr>
-            <a:r>
-              <a:rPr sz="1500" b="1">
+      <p:sp>
+        <p:nvSpPr>
+          <p:cNvPr id="5" name="Oval 4"/>
+          <p:cNvSpPr/>
+          <p:nvPr/>
+        </p:nvSpPr>
+        <p:spPr>
+          <a:xfrm>
+            <a:off x="640080" y="1691640"/>
+            <a:ext cx="457200" cy="457200"/>
+          </a:xfrm>
+          <a:prstGeom prst="ellipse">
+            <a:avLst/>
+          </a:prstGeom>
+          <a:solidFill>
+            <a:srgbClr val="1D1F23"/>
+          </a:solidFill>
+          <a:ln>
+            <a:noFill/>
+          </a:ln>
+          <a:effectLst/>
+        </p:spPr>
+        <p:style>
+          <a:lnRef idx="1">
+            <a:schemeClr val="accent1"/>
+          </a:lnRef>
+          <a:fillRef idx="3">
+            <a:schemeClr val="accent1"/>
+          </a:fillRef>
+          <a:effectRef idx="2">
+            <a:schemeClr val="accent1"/>
+          </a:effectRef>
+          <a:fontRef idx="minor">
+            <a:schemeClr val="lt1"/>
+          </a:fontRef>
+        </p:style>
+        <p:txBody>
+          <a:bodyPr rtlCol="0" anchor="ctr"/>
+          <a:lstStyle/>
+          <a:p>
+            <a:pPr algn="ctr"/>
+            <a:r>
+              <a:rPr sz="1400" b="1">
+                <a:solidFill>
+                  <a:srgbClr val="FFFFFF"/>
+                </a:solidFill>
+                <a:latin typeface="맑은 고딕"/>
+              </a:rPr>
+              <a:t>1</a:t>
+            </a:r>
+          </a:p>
+        </p:txBody>
+      </p:sp>
+      <p:sp>
+        <p:nvSpPr>
+          <p:cNvPr id="6" name="Rounded Rectangle 5"/>
+          <p:cNvSpPr/>
+          <p:nvPr/>
+        </p:nvSpPr>
+        <p:spPr>
+          <a:xfrm>
+            <a:off x="1371600" y="1719072"/>
+            <a:ext cx="731520" cy="384048"/>
+          </a:xfrm>
+          <a:prstGeom prst="roundRect">
+            <a:avLst>
+              <a:gd name="adj" fmla="val 28571"/>
+            </a:avLst>
+          </a:prstGeom>
+          <a:solidFill>
+            <a:srgbClr val="FFFFFF"/>
+          </a:solidFill>
+          <a:ln>
+            <a:solidFill>
+              <a:srgbClr val="2F7D5B"/>
+            </a:solidFill>
+          </a:ln>
+          <a:effectLst/>
+        </p:spPr>
+        <p:style>
+          <a:lnRef idx="1">
+            <a:schemeClr val="accent1"/>
+          </a:lnRef>
+          <a:fillRef idx="3">
+            <a:schemeClr val="accent1"/>
+          </a:fillRef>
+          <a:effectRef idx="2">
+            <a:schemeClr val="accent1"/>
+          </a:effectRef>
+          <a:fontRef idx="minor">
+            <a:schemeClr val="lt1"/>
+          </a:fontRef>
+        </p:style>
+        <p:txBody>
+          <a:bodyPr rtlCol="0" anchor="ctr"/>
+          <a:lstStyle/>
+          <a:p>
+            <a:pPr algn="ctr"/>
+            <a:r>
+              <a:rPr sz="1200" b="1">
+                <a:solidFill>
+                  <a:srgbClr val="2F7D5B"/>
+                </a:solidFill>
+                <a:latin typeface="맑은 고딕"/>
+              </a:rPr>
+              <a:t>전환</a:t>
+            </a:r>
+          </a:p>
+        </p:txBody>
+      </p:sp>
+      <p:sp>
+        <p:nvSpPr>
+          <p:cNvPr id="7" name="TextBox 6"/>
+          <p:cNvSpPr txBox="1"/>
+          <p:nvPr/>
+        </p:nvSpPr>
+        <p:spPr>
+          <a:xfrm>
+            <a:off x="2286000" y="1645920"/>
+            <a:ext cx="9326880" cy="411480"/>
+          </a:xfrm>
+          <a:prstGeom prst="rect">
+            <a:avLst/>
+          </a:prstGeom>
+          <a:noFill/>
+        </p:spPr>
+        <p:txBody>
+          <a:bodyPr wrap="square" anchor="t">
+            <a:spAutoFit/>
+          </a:bodyPr>
+          <a:lstStyle/>
+          <a:p>
+            <a:pPr algn="l">
+              <a:lnSpc>
+                <a:spcPct val="120000"/>
+              </a:lnSpc>
+            </a:pPr>
+            <a:r>
+              <a:rPr sz="1600" b="1">
                 <a:solidFill>
                   <a:srgbClr val="1D1F23"/>
                 </a:solidFill>
                 <a:latin typeface="맑은 고딕"/>
               </a:rPr>
-              <a:t>춘천, 호우일 (18일)</a:t>
-            </a:r>
-          </a:p>
-          <a:p>
-            <a:pPr algn="l">
-              <a:lnSpc>
-                <a:spcPct val="135000"/>
-              </a:lnSpc>
-            </a:pPr>
-            <a:r>
-              <a:rPr sz="1500" b="0">
+              <a:t>첫 탐색: '기후 효과 없음'?</a:t>
+            </a:r>
+          </a:p>
+        </p:txBody>
+      </p:sp>
+      <p:sp>
+        <p:nvSpPr>
+          <p:cNvPr id="8" name="TextBox 7"/>
+          <p:cNvSpPr txBox="1"/>
+          <p:nvPr/>
+        </p:nvSpPr>
+        <p:spPr>
+          <a:xfrm>
+            <a:off x="2286000" y="2057400"/>
+            <a:ext cx="9326880" cy="457200"/>
+          </a:xfrm>
+          <a:prstGeom prst="rect">
+            <a:avLst/>
+          </a:prstGeom>
+          <a:noFill/>
+        </p:spPr>
+        <p:txBody>
+          <a:bodyPr wrap="square" anchor="t">
+            <a:spAutoFit/>
+          </a:bodyPr>
+          <a:lstStyle/>
+          <a:p>
+            <a:pPr algn="l">
+              <a:lnSpc>
+                <a:spcPct val="120000"/>
+              </a:lnSpc>
+            </a:pPr>
+            <a:r>
+              <a:rPr sz="1300" b="0">
+                <a:solidFill>
+                  <a:srgbClr val="646A73"/>
+                </a:solidFill>
+                <a:latin typeface="맑은 고딕"/>
+              </a:rPr>
+              <a:t>세금·미분류 거액 결제가 신호를 덮고 있었음 → '핵심 소비'로 재검정하자 춘천 호우 효과가 드러남</a:t>
+            </a:r>
+          </a:p>
+        </p:txBody>
+      </p:sp>
+      <p:sp>
+        <p:nvSpPr>
+          <p:cNvPr id="9" name="Oval 8"/>
+          <p:cNvSpPr/>
+          <p:nvPr/>
+        </p:nvSpPr>
+        <p:spPr>
+          <a:xfrm>
+            <a:off x="640080" y="2624328"/>
+            <a:ext cx="457200" cy="457200"/>
+          </a:xfrm>
+          <a:prstGeom prst="ellipse">
+            <a:avLst/>
+          </a:prstGeom>
+          <a:solidFill>
+            <a:srgbClr val="1D1F23"/>
+          </a:solidFill>
+          <a:ln>
+            <a:noFill/>
+          </a:ln>
+          <a:effectLst/>
+        </p:spPr>
+        <p:style>
+          <a:lnRef idx="1">
+            <a:schemeClr val="accent1"/>
+          </a:lnRef>
+          <a:fillRef idx="3">
+            <a:schemeClr val="accent1"/>
+          </a:fillRef>
+          <a:effectRef idx="2">
+            <a:schemeClr val="accent1"/>
+          </a:effectRef>
+          <a:fontRef idx="minor">
+            <a:schemeClr val="lt1"/>
+          </a:fontRef>
+        </p:style>
+        <p:txBody>
+          <a:bodyPr rtlCol="0" anchor="ctr"/>
+          <a:lstStyle/>
+          <a:p>
+            <a:pPr algn="ctr"/>
+            <a:r>
+              <a:rPr sz="1400" b="1">
+                <a:solidFill>
+                  <a:srgbClr val="FFFFFF"/>
+                </a:solidFill>
+                <a:latin typeface="맑은 고딕"/>
+              </a:rPr>
+              <a:t>2</a:t>
+            </a:r>
+          </a:p>
+        </p:txBody>
+      </p:sp>
+      <p:sp>
+        <p:nvSpPr>
+          <p:cNvPr id="10" name="Rounded Rectangle 9"/>
+          <p:cNvSpPr/>
+          <p:nvPr/>
+        </p:nvSpPr>
+        <p:spPr>
+          <a:xfrm>
+            <a:off x="1371600" y="2651760"/>
+            <a:ext cx="731520" cy="384048"/>
+          </a:xfrm>
+          <a:prstGeom prst="roundRect">
+            <a:avLst>
+              <a:gd name="adj" fmla="val 28571"/>
+            </a:avLst>
+          </a:prstGeom>
+          <a:solidFill>
+            <a:srgbClr val="FFFFFF"/>
+          </a:solidFill>
+          <a:ln>
+            <a:solidFill>
+              <a:srgbClr val="2F7D5B"/>
+            </a:solidFill>
+          </a:ln>
+          <a:effectLst/>
+        </p:spPr>
+        <p:style>
+          <a:lnRef idx="1">
+            <a:schemeClr val="accent1"/>
+          </a:lnRef>
+          <a:fillRef idx="3">
+            <a:schemeClr val="accent1"/>
+          </a:fillRef>
+          <a:effectRef idx="2">
+            <a:schemeClr val="accent1"/>
+          </a:effectRef>
+          <a:fontRef idx="minor">
+            <a:schemeClr val="lt1"/>
+          </a:fontRef>
+        </p:style>
+        <p:txBody>
+          <a:bodyPr rtlCol="0" anchor="ctr"/>
+          <a:lstStyle/>
+          <a:p>
+            <a:pPr algn="ctr"/>
+            <a:r>
+              <a:rPr sz="1200" b="1">
+                <a:solidFill>
+                  <a:srgbClr val="2F7D5B"/>
+                </a:solidFill>
+                <a:latin typeface="맑은 고딕"/>
+              </a:rPr>
+              <a:t>보완</a:t>
+            </a:r>
+          </a:p>
+        </p:txBody>
+      </p:sp>
+      <p:sp>
+        <p:nvSpPr>
+          <p:cNvPr id="11" name="TextBox 10"/>
+          <p:cNvSpPr txBox="1"/>
+          <p:nvPr/>
+        </p:nvSpPr>
+        <p:spPr>
+          <a:xfrm>
+            <a:off x="2286000" y="2578608"/>
+            <a:ext cx="9326880" cy="411480"/>
+          </a:xfrm>
+          <a:prstGeom prst="rect">
+            <a:avLst/>
+          </a:prstGeom>
+          <a:noFill/>
+        </p:spPr>
+        <p:txBody>
+          <a:bodyPr wrap="square" anchor="t">
+            <a:spAutoFit/>
+          </a:bodyPr>
+          <a:lstStyle/>
+          <a:p>
+            <a:pPr algn="l">
+              <a:lnSpc>
+                <a:spcPct val="120000"/>
+              </a:lnSpc>
+            </a:pPr>
+            <a:r>
+              <a:rPr sz="1600" b="1">
                 <a:solidFill>
                   <a:srgbClr val="1D1F23"/>
                 </a:solidFill>
                 <a:latin typeface="맑은 고딕"/>
               </a:rPr>
-              <a:t>· 타 시도 방문객  −19.1%</a:t>
-            </a:r>
-          </a:p>
-          <a:p>
-            <a:pPr algn="l">
-              <a:lnSpc>
-                <a:spcPct val="135000"/>
-              </a:lnSpc>
-            </a:pPr>
-            <a:r>
-              <a:rPr sz="1500" b="0">
+              <a:t>검정 방법 업그레이드</a:t>
+            </a:r>
+          </a:p>
+        </p:txBody>
+      </p:sp>
+      <p:sp>
+        <p:nvSpPr>
+          <p:cNvPr id="12" name="TextBox 11"/>
+          <p:cNvSpPr txBox="1"/>
+          <p:nvPr/>
+        </p:nvSpPr>
+        <p:spPr>
+          <a:xfrm>
+            <a:off x="2286000" y="2990088"/>
+            <a:ext cx="9326880" cy="457200"/>
+          </a:xfrm>
+          <a:prstGeom prst="rect">
+            <a:avLst/>
+          </a:prstGeom>
+          <a:noFill/>
+        </p:spPr>
+        <p:txBody>
+          <a:bodyPr wrap="square" anchor="t">
+            <a:spAutoFit/>
+          </a:bodyPr>
+          <a:lstStyle/>
+          <a:p>
+            <a:pPr algn="l">
+              <a:lnSpc>
+                <a:spcPct val="120000"/>
+              </a:lnSpc>
+            </a:pPr>
+            <a:r>
+              <a:rPr sz="1300" b="0">
+                <a:solidFill>
+                  <a:srgbClr val="646A73"/>
+                </a:solidFill>
+                <a:latin typeface="맑은 고딕"/>
+              </a:rPr>
+              <a:t>순열검정의 약점(자기상관·공휴일·다중검정) → 회귀 + HAC 표준오차 + FDR 보정으로 재분석</a:t>
+            </a:r>
+          </a:p>
+        </p:txBody>
+      </p:sp>
+      <p:sp>
+        <p:nvSpPr>
+          <p:cNvPr id="13" name="Oval 12"/>
+          <p:cNvSpPr/>
+          <p:nvPr/>
+        </p:nvSpPr>
+        <p:spPr>
+          <a:xfrm>
+            <a:off x="640080" y="3557016"/>
+            <a:ext cx="457200" cy="457200"/>
+          </a:xfrm>
+          <a:prstGeom prst="ellipse">
+            <a:avLst/>
+          </a:prstGeom>
+          <a:solidFill>
+            <a:srgbClr val="1D1F23"/>
+          </a:solidFill>
+          <a:ln>
+            <a:noFill/>
+          </a:ln>
+          <a:effectLst/>
+        </p:spPr>
+        <p:style>
+          <a:lnRef idx="1">
+            <a:schemeClr val="accent1"/>
+          </a:lnRef>
+          <a:fillRef idx="3">
+            <a:schemeClr val="accent1"/>
+          </a:fillRef>
+          <a:effectRef idx="2">
+            <a:schemeClr val="accent1"/>
+          </a:effectRef>
+          <a:fontRef idx="minor">
+            <a:schemeClr val="lt1"/>
+          </a:fontRef>
+        </p:style>
+        <p:txBody>
+          <a:bodyPr rtlCol="0" anchor="ctr"/>
+          <a:lstStyle/>
+          <a:p>
+            <a:pPr algn="ctr"/>
+            <a:r>
+              <a:rPr sz="1400" b="1">
+                <a:solidFill>
+                  <a:srgbClr val="FFFFFF"/>
+                </a:solidFill>
+                <a:latin typeface="맑은 고딕"/>
+              </a:rPr>
+              <a:t>3</a:t>
+            </a:r>
+          </a:p>
+        </p:txBody>
+      </p:sp>
+      <p:sp>
+        <p:nvSpPr>
+          <p:cNvPr id="14" name="Rounded Rectangle 13"/>
+          <p:cNvSpPr/>
+          <p:nvPr/>
+        </p:nvSpPr>
+        <p:spPr>
+          <a:xfrm>
+            <a:off x="1371600" y="3584448"/>
+            <a:ext cx="731520" cy="384048"/>
+          </a:xfrm>
+          <a:prstGeom prst="roundRect">
+            <a:avLst>
+              <a:gd name="adj" fmla="val 28571"/>
+            </a:avLst>
+          </a:prstGeom>
+          <a:solidFill>
+            <a:srgbClr val="FFFFFF"/>
+          </a:solidFill>
+          <a:ln>
+            <a:solidFill>
+              <a:srgbClr val="A8552F"/>
+            </a:solidFill>
+          </a:ln>
+          <a:effectLst/>
+        </p:spPr>
+        <p:style>
+          <a:lnRef idx="1">
+            <a:schemeClr val="accent1"/>
+          </a:lnRef>
+          <a:fillRef idx="3">
+            <a:schemeClr val="accent1"/>
+          </a:fillRef>
+          <a:effectRef idx="2">
+            <a:schemeClr val="accent1"/>
+          </a:effectRef>
+          <a:fontRef idx="minor">
+            <a:schemeClr val="lt1"/>
+          </a:fontRef>
+        </p:style>
+        <p:txBody>
+          <a:bodyPr rtlCol="0" anchor="ctr"/>
+          <a:lstStyle/>
+          <a:p>
+            <a:pPr algn="ctr"/>
+            <a:r>
+              <a:rPr sz="1200" b="1">
+                <a:solidFill>
+                  <a:srgbClr val="A8552F"/>
+                </a:solidFill>
+                <a:latin typeface="맑은 고딕"/>
+              </a:rPr>
+              <a:t>기각</a:t>
+            </a:r>
+          </a:p>
+        </p:txBody>
+      </p:sp>
+      <p:sp>
+        <p:nvSpPr>
+          <p:cNvPr id="15" name="TextBox 14"/>
+          <p:cNvSpPr txBox="1"/>
+          <p:nvPr/>
+        </p:nvSpPr>
+        <p:spPr>
+          <a:xfrm>
+            <a:off x="2286000" y="3511296"/>
+            <a:ext cx="9326880" cy="411480"/>
+          </a:xfrm>
+          <a:prstGeom prst="rect">
+            <a:avLst/>
+          </a:prstGeom>
+          <a:noFill/>
+        </p:spPr>
+        <p:txBody>
+          <a:bodyPr wrap="square" anchor="t">
+            <a:spAutoFit/>
+          </a:bodyPr>
+          <a:lstStyle/>
+          <a:p>
+            <a:pPr algn="l">
+              <a:lnSpc>
+                <a:spcPct val="120000"/>
+              </a:lnSpc>
+            </a:pPr>
+            <a:r>
+              <a:rPr sz="1600" b="1">
                 <a:solidFill>
                   <a:srgbClr val="1D1F23"/>
                 </a:solidFill>
                 <a:latin typeface="맑은 고딕"/>
               </a:rPr>
-              <a:t>   95% CI  −25.0% ~ −12.7%</a:t>
-            </a:r>
-          </a:p>
-          <a:p>
-            <a:pPr algn="l">
-              <a:lnSpc>
-                <a:spcPct val="135000"/>
-              </a:lnSpc>
-            </a:pPr>
-            <a:r>
-              <a:rPr sz="1500" b="0">
+              <a:t>가설 A: 방문객 많은 업종일수록 취약</a:t>
+            </a:r>
+          </a:p>
+        </p:txBody>
+      </p:sp>
+      <p:sp>
+        <p:nvSpPr>
+          <p:cNvPr id="16" name="TextBox 15"/>
+          <p:cNvSpPr txBox="1"/>
+          <p:nvPr/>
+        </p:nvSpPr>
+        <p:spPr>
+          <a:xfrm>
+            <a:off x="2286000" y="3922776"/>
+            <a:ext cx="9326880" cy="457200"/>
+          </a:xfrm>
+          <a:prstGeom prst="rect">
+            <a:avLst/>
+          </a:prstGeom>
+          <a:noFill/>
+        </p:spPr>
+        <p:txBody>
+          <a:bodyPr wrap="square" anchor="t">
+            <a:spAutoFit/>
+          </a:bodyPr>
+          <a:lstStyle/>
+          <a:p>
+            <a:pPr algn="l">
+              <a:lnSpc>
+                <a:spcPct val="120000"/>
+              </a:lnSpc>
+            </a:pPr>
+            <a:r>
+              <a:rPr sz="1300" b="0">
+                <a:solidFill>
+                  <a:srgbClr val="646A73"/>
+                </a:solidFill>
+                <a:latin typeface="맑은 고딕"/>
+              </a:rPr>
+              <a:t>업종별 방문객 비중 vs 비 효과 상관 ρ = −0.04(춘천), 0.16(강남) → 관계 없음</a:t>
+            </a:r>
+          </a:p>
+        </p:txBody>
+      </p:sp>
+      <p:sp>
+        <p:nvSpPr>
+          <p:cNvPr id="17" name="Oval 16"/>
+          <p:cNvSpPr/>
+          <p:nvPr/>
+        </p:nvSpPr>
+        <p:spPr>
+          <a:xfrm>
+            <a:off x="640080" y="4489704"/>
+            <a:ext cx="457200" cy="457200"/>
+          </a:xfrm>
+          <a:prstGeom prst="ellipse">
+            <a:avLst/>
+          </a:prstGeom>
+          <a:solidFill>
+            <a:srgbClr val="1D1F23"/>
+          </a:solidFill>
+          <a:ln>
+            <a:noFill/>
+          </a:ln>
+          <a:effectLst/>
+        </p:spPr>
+        <p:style>
+          <a:lnRef idx="1">
+            <a:schemeClr val="accent1"/>
+          </a:lnRef>
+          <a:fillRef idx="3">
+            <a:schemeClr val="accent1"/>
+          </a:fillRef>
+          <a:effectRef idx="2">
+            <a:schemeClr val="accent1"/>
+          </a:effectRef>
+          <a:fontRef idx="minor">
+            <a:schemeClr val="lt1"/>
+          </a:fontRef>
+        </p:style>
+        <p:txBody>
+          <a:bodyPr rtlCol="0" anchor="ctr"/>
+          <a:lstStyle/>
+          <a:p>
+            <a:pPr algn="ctr"/>
+            <a:r>
+              <a:rPr sz="1400" b="1">
+                <a:solidFill>
+                  <a:srgbClr val="FFFFFF"/>
+                </a:solidFill>
+                <a:latin typeface="맑은 고딕"/>
+              </a:rPr>
+              <a:t>4</a:t>
+            </a:r>
+          </a:p>
+        </p:txBody>
+      </p:sp>
+      <p:sp>
+        <p:nvSpPr>
+          <p:cNvPr id="18" name="Rounded Rectangle 17"/>
+          <p:cNvSpPr/>
+          <p:nvPr/>
+        </p:nvSpPr>
+        <p:spPr>
+          <a:xfrm>
+            <a:off x="1371600" y="4517136"/>
+            <a:ext cx="731520" cy="384048"/>
+          </a:xfrm>
+          <a:prstGeom prst="roundRect">
+            <a:avLst>
+              <a:gd name="adj" fmla="val 28571"/>
+            </a:avLst>
+          </a:prstGeom>
+          <a:solidFill>
+            <a:srgbClr val="FFFFFF"/>
+          </a:solidFill>
+          <a:ln>
+            <a:solidFill>
+              <a:srgbClr val="A8552F"/>
+            </a:solidFill>
+          </a:ln>
+          <a:effectLst/>
+        </p:spPr>
+        <p:style>
+          <a:lnRef idx="1">
+            <a:schemeClr val="accent1"/>
+          </a:lnRef>
+          <a:fillRef idx="3">
+            <a:schemeClr val="accent1"/>
+          </a:fillRef>
+          <a:effectRef idx="2">
+            <a:schemeClr val="accent1"/>
+          </a:effectRef>
+          <a:fontRef idx="minor">
+            <a:schemeClr val="lt1"/>
+          </a:fontRef>
+        </p:style>
+        <p:txBody>
+          <a:bodyPr rtlCol="0" anchor="ctr"/>
+          <a:lstStyle/>
+          <a:p>
+            <a:pPr algn="ctr"/>
+            <a:r>
+              <a:rPr sz="1200" b="1">
+                <a:solidFill>
+                  <a:srgbClr val="A8552F"/>
+                </a:solidFill>
+                <a:latin typeface="맑은 고딕"/>
+              </a:rPr>
+              <a:t>기각</a:t>
+            </a:r>
+          </a:p>
+        </p:txBody>
+      </p:sp>
+      <p:sp>
+        <p:nvSpPr>
+          <p:cNvPr id="19" name="TextBox 18"/>
+          <p:cNvSpPr txBox="1"/>
+          <p:nvPr/>
+        </p:nvSpPr>
+        <p:spPr>
+          <a:xfrm>
+            <a:off x="2286000" y="4443984"/>
+            <a:ext cx="9326880" cy="411480"/>
+          </a:xfrm>
+          <a:prstGeom prst="rect">
+            <a:avLst/>
+          </a:prstGeom>
+          <a:noFill/>
+        </p:spPr>
+        <p:txBody>
+          <a:bodyPr wrap="square" anchor="t">
+            <a:spAutoFit/>
+          </a:bodyPr>
+          <a:lstStyle/>
+          <a:p>
+            <a:pPr algn="l">
+              <a:lnSpc>
+                <a:spcPct val="120000"/>
+              </a:lnSpc>
+            </a:pPr>
+            <a:r>
+              <a:rPr sz="1600" b="1">
                 <a:solidFill>
                   <a:srgbClr val="1D1F23"/>
                 </a:solidFill>
                 <a:latin typeface="맑은 고딕"/>
               </a:rPr>
-              <a:t>· 동일 시도 거주자  −6.4%</a:t>
-            </a:r>
-          </a:p>
-          <a:p>
-            <a:pPr algn="l">
-              <a:lnSpc>
-                <a:spcPct val="135000"/>
-              </a:lnSpc>
-            </a:pPr>
-            <a:r>
-              <a:rPr sz="1500" b="0">
+              <a:t>가설 B: 강남은 지하철·지하상가가 방어</a:t>
+            </a:r>
+          </a:p>
+        </p:txBody>
+      </p:sp>
+      <p:sp>
+        <p:nvSpPr>
+          <p:cNvPr id="20" name="TextBox 19"/>
+          <p:cNvSpPr txBox="1"/>
+          <p:nvPr/>
+        </p:nvSpPr>
+        <p:spPr>
+          <a:xfrm>
+            <a:off x="2286000" y="4855464"/>
+            <a:ext cx="9326880" cy="457200"/>
+          </a:xfrm>
+          <a:prstGeom prst="rect">
+            <a:avLst/>
+          </a:prstGeom>
+          <a:noFill/>
+        </p:spPr>
+        <p:txBody>
+          <a:bodyPr wrap="square" anchor="t">
+            <a:spAutoFit/>
+          </a:bodyPr>
+          <a:lstStyle/>
+          <a:p>
+            <a:pPr algn="l">
+              <a:lnSpc>
+                <a:spcPct val="120000"/>
+              </a:lnSpc>
+            </a:pPr>
+            <a:r>
+              <a:rPr sz="1300" b="0">
+                <a:solidFill>
+                  <a:srgbClr val="646A73"/>
+                </a:solidFill>
+                <a:latin typeface="맑은 고딕"/>
+              </a:rPr>
+              <a:t>두 지역 차이를 상호작용항으로 직접 검정 → p = 0.40, 지역 간 비교 주장은 하지 않음</a:t>
+            </a:r>
+          </a:p>
+        </p:txBody>
+      </p:sp>
+      <p:sp>
+        <p:nvSpPr>
+          <p:cNvPr id="21" name="Oval 20"/>
+          <p:cNvSpPr/>
+          <p:nvPr/>
+        </p:nvSpPr>
+        <p:spPr>
+          <a:xfrm>
+            <a:off x="640080" y="5422392"/>
+            <a:ext cx="457200" cy="457200"/>
+          </a:xfrm>
+          <a:prstGeom prst="ellipse">
+            <a:avLst/>
+          </a:prstGeom>
+          <a:solidFill>
+            <a:srgbClr val="1D1F23"/>
+          </a:solidFill>
+          <a:ln>
+            <a:noFill/>
+          </a:ln>
+          <a:effectLst/>
+        </p:spPr>
+        <p:style>
+          <a:lnRef idx="1">
+            <a:schemeClr val="accent1"/>
+          </a:lnRef>
+          <a:fillRef idx="3">
+            <a:schemeClr val="accent1"/>
+          </a:fillRef>
+          <a:effectRef idx="2">
+            <a:schemeClr val="accent1"/>
+          </a:effectRef>
+          <a:fontRef idx="minor">
+            <a:schemeClr val="lt1"/>
+          </a:fontRef>
+        </p:style>
+        <p:txBody>
+          <a:bodyPr rtlCol="0" anchor="ctr"/>
+          <a:lstStyle/>
+          <a:p>
+            <a:pPr algn="ctr"/>
+            <a:r>
+              <a:rPr sz="1400" b="1">
+                <a:solidFill>
+                  <a:srgbClr val="FFFFFF"/>
+                </a:solidFill>
+                <a:latin typeface="맑은 고딕"/>
+              </a:rPr>
+              <a:t>5</a:t>
+            </a:r>
+          </a:p>
+        </p:txBody>
+      </p:sp>
+      <p:sp>
+        <p:nvSpPr>
+          <p:cNvPr id="22" name="Rounded Rectangle 21"/>
+          <p:cNvSpPr/>
+          <p:nvPr/>
+        </p:nvSpPr>
+        <p:spPr>
+          <a:xfrm>
+            <a:off x="1371600" y="5449824"/>
+            <a:ext cx="731520" cy="384048"/>
+          </a:xfrm>
+          <a:prstGeom prst="roundRect">
+            <a:avLst>
+              <a:gd name="adj" fmla="val 28571"/>
+            </a:avLst>
+          </a:prstGeom>
+          <a:solidFill>
+            <a:srgbClr val="FFFFFF"/>
+          </a:solidFill>
+          <a:ln>
+            <a:solidFill>
+              <a:srgbClr val="2F7D5B"/>
+            </a:solidFill>
+          </a:ln>
+          <a:effectLst/>
+        </p:spPr>
+        <p:style>
+          <a:lnRef idx="1">
+            <a:schemeClr val="accent1"/>
+          </a:lnRef>
+          <a:fillRef idx="3">
+            <a:schemeClr val="accent1"/>
+          </a:fillRef>
+          <a:effectRef idx="2">
+            <a:schemeClr val="accent1"/>
+          </a:effectRef>
+          <a:fontRef idx="minor">
+            <a:schemeClr val="lt1"/>
+          </a:fontRef>
+        </p:style>
+        <p:txBody>
+          <a:bodyPr rtlCol="0" anchor="ctr"/>
+          <a:lstStyle/>
+          <a:p>
+            <a:pPr algn="ctr"/>
+            <a:r>
+              <a:rPr sz="1200" b="1">
+                <a:solidFill>
+                  <a:srgbClr val="2F7D5B"/>
+                </a:solidFill>
+                <a:latin typeface="맑은 고딕"/>
+              </a:rPr>
+              <a:t>채택</a:t>
+            </a:r>
+          </a:p>
+        </p:txBody>
+      </p:sp>
+      <p:sp>
+        <p:nvSpPr>
+          <p:cNvPr id="23" name="TextBox 22"/>
+          <p:cNvSpPr txBox="1"/>
+          <p:nvPr/>
+        </p:nvSpPr>
+        <p:spPr>
+          <a:xfrm>
+            <a:off x="2286000" y="5376672"/>
+            <a:ext cx="9326880" cy="411480"/>
+          </a:xfrm>
+          <a:prstGeom prst="rect">
+            <a:avLst/>
+          </a:prstGeom>
+          <a:noFill/>
+        </p:spPr>
+        <p:txBody>
+          <a:bodyPr wrap="square" anchor="t">
+            <a:spAutoFit/>
+          </a:bodyPr>
+          <a:lstStyle/>
+          <a:p>
+            <a:pPr algn="l">
+              <a:lnSpc>
+                <a:spcPct val="120000"/>
+              </a:lnSpc>
+            </a:pPr>
+            <a:r>
+              <a:rPr sz="1600" b="1">
                 <a:solidFill>
                   <a:srgbClr val="1D1F23"/>
                 </a:solidFill>
                 <a:latin typeface="맑은 고딕"/>
               </a:rPr>
-              <a:t>   95% CI  −9.9% ~ −2.7%</a:t>
-            </a:r>
-          </a:p>
-          <a:p>
-            <a:pPr algn="l">
-              <a:lnSpc>
-                <a:spcPct val="135000"/>
-              </a:lnSpc>
-            </a:pPr>
-          </a:p>
-          <a:p>
-            <a:pPr algn="l">
-              <a:lnSpc>
-                <a:spcPct val="135000"/>
-              </a:lnSpc>
-            </a:pPr>
-            <a:r>
-              <a:rPr sz="1500" b="0">
-                <a:solidFill>
-                  <a:srgbClr val="1D1F23"/>
-                </a:solidFill>
-                <a:latin typeface="맑은 고딕"/>
-              </a:rPr>
-              <a:t>두 신뢰구간이 겹치지 않음</a:t>
-            </a:r>
-          </a:p>
-          <a:p>
-            <a:pPr algn="l">
-              <a:lnSpc>
-                <a:spcPct val="135000"/>
-              </a:lnSpc>
-            </a:pPr>
-            <a:r>
-              <a:rPr sz="1500" b="0">
-                <a:solidFill>
-                  <a:srgbClr val="1D1F23"/>
-                </a:solidFill>
-                <a:latin typeface="맑은 고딕"/>
-              </a:rPr>
-              <a:t>→ 방문객이 확실히 더 크게 줄어든다</a:t>
-            </a:r>
-          </a:p>
-          <a:p>
-            <a:pPr algn="l">
-              <a:lnSpc>
-                <a:spcPct val="135000"/>
-              </a:lnSpc>
-            </a:pPr>
-          </a:p>
-          <a:p>
-            <a:pPr algn="l">
-              <a:lnSpc>
-                <a:spcPct val="135000"/>
-              </a:lnSpc>
-            </a:pPr>
-            <a:r>
-              <a:rPr sz="1500" b="0">
-                <a:solidFill>
-                  <a:srgbClr val="1D1F23"/>
-                </a:solidFill>
-                <a:latin typeface="맑은 고딕"/>
-              </a:rPr>
-              <a:t>강남은 두 그룹 모두 유의하지 않음</a:t>
+              <a:t>최종: 범위는 좁게, 근거는 단단하게</a:t>
+            </a:r>
+          </a:p>
+        </p:txBody>
+      </p:sp>
+      <p:sp>
+        <p:nvSpPr>
+          <p:cNvPr id="24" name="TextBox 23"/>
+          <p:cNvSpPr txBox="1"/>
+          <p:nvPr/>
+        </p:nvSpPr>
+        <p:spPr>
+          <a:xfrm>
+            <a:off x="2286000" y="5788152"/>
+            <a:ext cx="9326880" cy="457200"/>
+          </a:xfrm>
+          <a:prstGeom prst="rect">
+            <a:avLst/>
+          </a:prstGeom>
+          <a:noFill/>
+        </p:spPr>
+        <p:txBody>
+          <a:bodyPr wrap="square" anchor="t">
+            <a:spAutoFit/>
+          </a:bodyPr>
+          <a:lstStyle/>
+          <a:p>
+            <a:pPr algn="l">
+              <a:lnSpc>
+                <a:spcPct val="120000"/>
+              </a:lnSpc>
+            </a:pPr>
+            <a:r>
+              <a:rPr sz="1300" b="0">
+                <a:solidFill>
+                  <a:srgbClr val="646A73"/>
+                </a:solidFill>
+                <a:latin typeface="맑은 고딕"/>
+              </a:rPr>
+              <a:t>춘천 안에서 방문객 vs 지역주민 차이(신뢰구간 겹치지 않음) → '외지 방문객 매출 비중'을 취약도 지표로 제안</a:t>
             </a:r>
           </a:p>
         </p:txBody>
@@ -8581,7 +10491,7 @@
                 </a:solidFill>
                 <a:latin typeface="맑은 고딕"/>
               </a:rPr>
-              <a:t>ROBUSTNESS</a:t>
+              <a:t>RESULT ①</a:t>
             </a:r>
           </a:p>
         </p:txBody>
@@ -8620,7 +10530,7 @@
                 </a:solidFill>
                 <a:latin typeface="맑은 고딕"/>
               </a:rPr>
-              <a:t>'30mm를 골라서 나온 우연' 아닌가?</a:t>
+              <a:t>지역 전체로 보면, 결론이 애매하다</a:t>
             </a:r>
           </a:p>
         </p:txBody>
@@ -8666,7 +10576,7 @@
       </p:sp>
       <p:pic>
         <p:nvPicPr>
-          <p:cNvPr id="5" name="Picture 4" descr="pt_03_robustness.png"/>
+          <p:cNvPr id="5" name="Picture 4" descr="pt_01_region_overview.png"/>
           <p:cNvPicPr>
             <a:picLocks noChangeAspect="1"/>
           </p:cNvPicPr>
@@ -8680,8 +10590,8 @@
         </p:blipFill>
         <p:spPr>
           <a:xfrm>
-            <a:off x="548640" y="1600200"/>
-            <a:ext cx="6650182" cy="4572000"/>
+            <a:off x="640080" y="1600200"/>
+            <a:ext cx="6339840" cy="4754880"/>
           </a:xfrm>
           <a:prstGeom prst="rect">
             <a:avLst/>
@@ -8696,228 +10606,159 @@
         </p:nvSpPr>
         <p:spPr>
           <a:xfrm>
-            <a:off x="7406640" y="1828800"/>
-            <a:ext cx="4297680" cy="365760"/>
-          </a:xfrm>
-          <a:prstGeom prst="rect">
-            <a:avLst/>
-          </a:prstGeom>
-          <a:noFill/>
-        </p:spPr>
-        <p:txBody>
-          <a:bodyPr wrap="square" anchor="t">
-            <a:spAutoFit/>
-          </a:bodyPr>
-          <a:lstStyle/>
-          <a:p>
-            <a:pPr algn="l">
-              <a:lnSpc>
-                <a:spcPct val="120000"/>
+            <a:off x="7223760" y="2011680"/>
+            <a:ext cx="4389120" cy="4114800"/>
+          </a:xfrm>
+          <a:prstGeom prst="rect">
+            <a:avLst/>
+          </a:prstGeom>
+          <a:noFill/>
+        </p:spPr>
+        <p:txBody>
+          <a:bodyPr wrap="square" anchor="t">
+            <a:spAutoFit/>
+          </a:bodyPr>
+          <a:lstStyle/>
+          <a:p>
+            <a:pPr algn="l">
+              <a:lnSpc>
+                <a:spcPct val="135000"/>
               </a:lnSpc>
             </a:pPr>
             <a:r>
               <a:rPr sz="1500" b="1">
                 <a:solidFill>
-                  <a:srgbClr val="2F7D5B"/>
-                </a:solidFill>
-                <a:latin typeface="맑은 고딕"/>
-              </a:rPr>
-              <a:t>✓  호우 기준값 15~40mm</a:t>
-            </a:r>
-          </a:p>
-        </p:txBody>
-      </p:sp>
-      <p:sp>
-        <p:nvSpPr>
-          <p:cNvPr id="7" name="TextBox 6"/>
-          <p:cNvSpPr txBox="1"/>
-          <p:nvPr/>
-        </p:nvSpPr>
-        <p:spPr>
-          <a:xfrm>
-            <a:off x="7726679" y="2212848"/>
-            <a:ext cx="3977639" cy="822960"/>
-          </a:xfrm>
-          <a:prstGeom prst="rect">
-            <a:avLst/>
-          </a:prstGeom>
-          <a:noFill/>
-        </p:spPr>
-        <p:txBody>
-          <a:bodyPr wrap="square" anchor="t">
-            <a:spAutoFit/>
-          </a:bodyPr>
-          <a:lstStyle/>
-          <a:p>
-            <a:pPr algn="l">
-              <a:lnSpc>
-                <a:spcPct val="130000"/>
-              </a:lnSpc>
-            </a:pPr>
-            <a:r>
-              <a:rPr sz="1300" b="0">
-                <a:solidFill>
-                  <a:srgbClr val="646A73"/>
-                </a:solidFill>
-                <a:latin typeface="맑은 고딕"/>
-              </a:rPr>
-              <a:t>6단계 모두 방문객(−17.6~−19.5%)이 지역주민(−5.9~−9.0%)보다 크게 감소</a:t>
-            </a:r>
-          </a:p>
-        </p:txBody>
-      </p:sp>
-      <p:sp>
-        <p:nvSpPr>
-          <p:cNvPr id="8" name="TextBox 7"/>
-          <p:cNvSpPr txBox="1"/>
-          <p:nvPr/>
-        </p:nvSpPr>
-        <p:spPr>
-          <a:xfrm>
-            <a:off x="7406640" y="3154680"/>
-            <a:ext cx="4297680" cy="365760"/>
-          </a:xfrm>
-          <a:prstGeom prst="rect">
-            <a:avLst/>
-          </a:prstGeom>
-          <a:noFill/>
-        </p:spPr>
-        <p:txBody>
-          <a:bodyPr wrap="square" anchor="t">
-            <a:spAutoFit/>
-          </a:bodyPr>
-          <a:lstStyle/>
-          <a:p>
-            <a:pPr algn="l">
-              <a:lnSpc>
-                <a:spcPct val="120000"/>
+                  <a:srgbClr val="1D1F23"/>
+                </a:solidFill>
+                <a:latin typeface="맑은 고딕"/>
+              </a:rPr>
+              <a:t>호우일 핵심 소비 변화</a:t>
+            </a:r>
+          </a:p>
+          <a:p>
+            <a:pPr algn="l">
+              <a:lnSpc>
+                <a:spcPct val="135000"/>
+              </a:lnSpc>
+            </a:pPr>
+            <a:r>
+              <a:rPr sz="1500" b="0">
+                <a:solidFill>
+                  <a:srgbClr val="1D1F23"/>
+                </a:solidFill>
+                <a:latin typeface="맑은 고딕"/>
+              </a:rPr>
+              <a:t>· 강남 −11.0%  (p = 0.069)</a:t>
+            </a:r>
+          </a:p>
+          <a:p>
+            <a:pPr algn="l">
+              <a:lnSpc>
+                <a:spcPct val="135000"/>
+              </a:lnSpc>
+            </a:pPr>
+            <a:r>
+              <a:rPr sz="1500" b="0">
+                <a:solidFill>
+                  <a:srgbClr val="1D1F23"/>
+                </a:solidFill>
+                <a:latin typeface="맑은 고딕"/>
+              </a:rPr>
+              <a:t>   95% 신뢰구간이 0을 포함 → 불확실</a:t>
+            </a:r>
+          </a:p>
+          <a:p>
+            <a:pPr algn="l">
+              <a:lnSpc>
+                <a:spcPct val="135000"/>
+              </a:lnSpc>
+            </a:pPr>
+            <a:r>
+              <a:rPr sz="1500" b="0">
+                <a:solidFill>
+                  <a:srgbClr val="1D1F23"/>
+                </a:solidFill>
+                <a:latin typeface="맑은 고딕"/>
+              </a:rPr>
+              <a:t>· 춘천 −8.6%  (p &lt; 0.001)</a:t>
+            </a:r>
+          </a:p>
+          <a:p>
+            <a:pPr algn="l">
+              <a:lnSpc>
+                <a:spcPct val="135000"/>
+              </a:lnSpc>
+            </a:pPr>
+          </a:p>
+          <a:p>
+            <a:pPr algn="l">
+              <a:lnSpc>
+                <a:spcPct val="135000"/>
               </a:lnSpc>
             </a:pPr>
             <a:r>
               <a:rPr sz="1500" b="1">
                 <a:solidFill>
-                  <a:srgbClr val="2F7D5B"/>
-                </a:solidFill>
-                <a:latin typeface="맑은 고딕"/>
-              </a:rPr>
-              <a:t>✓  전일 강수 지연효과</a:t>
-            </a:r>
-          </a:p>
-        </p:txBody>
-      </p:sp>
-      <p:sp>
-        <p:nvSpPr>
-          <p:cNvPr id="9" name="TextBox 8"/>
-          <p:cNvSpPr txBox="1"/>
-          <p:nvPr/>
-        </p:nvSpPr>
-        <p:spPr>
-          <a:xfrm>
-            <a:off x="7726679" y="3538728"/>
-            <a:ext cx="3977639" cy="822960"/>
-          </a:xfrm>
-          <a:prstGeom prst="rect">
-            <a:avLst/>
-          </a:prstGeom>
-          <a:noFill/>
-        </p:spPr>
-        <p:txBody>
-          <a:bodyPr wrap="square" anchor="t">
-            <a:spAutoFit/>
-          </a:bodyPr>
-          <a:lstStyle/>
-          <a:p>
-            <a:pPr algn="l">
-              <a:lnSpc>
-                <a:spcPct val="130000"/>
-              </a:lnSpc>
-            </a:pPr>
-            <a:r>
-              <a:rPr sz="1300" b="0">
-                <a:solidFill>
-                  <a:srgbClr val="646A73"/>
-                </a:solidFill>
-                <a:latin typeface="맑은 고딕"/>
-              </a:rPr>
-              <a:t>'어제 호우' 변수 추가 → 지연효과 없음(p=0.46~0.73), 당일 효과 유지</a:t>
-            </a:r>
-          </a:p>
-        </p:txBody>
-      </p:sp>
-      <p:sp>
-        <p:nvSpPr>
-          <p:cNvPr id="10" name="TextBox 9"/>
-          <p:cNvSpPr txBox="1"/>
-          <p:nvPr/>
-        </p:nvSpPr>
-        <p:spPr>
-          <a:xfrm>
-            <a:off x="7406640" y="4480560"/>
-            <a:ext cx="4297680" cy="365760"/>
-          </a:xfrm>
-          <a:prstGeom prst="rect">
-            <a:avLst/>
-          </a:prstGeom>
-          <a:noFill/>
-        </p:spPr>
-        <p:txBody>
-          <a:bodyPr wrap="square" anchor="t">
-            <a:spAutoFit/>
-          </a:bodyPr>
-          <a:lstStyle/>
-          <a:p>
-            <a:pPr algn="l">
-              <a:lnSpc>
-                <a:spcPct val="120000"/>
-              </a:lnSpc>
-            </a:pPr>
-            <a:r>
-              <a:rPr sz="1500" b="1">
-                <a:solidFill>
-                  <a:srgbClr val="2F7D5B"/>
-                </a:solidFill>
-                <a:latin typeface="맑은 고딕"/>
-              </a:rPr>
-              <a:t>✓  폭염 기준 30~35℃</a:t>
-            </a:r>
-          </a:p>
-        </p:txBody>
-      </p:sp>
-      <p:sp>
-        <p:nvSpPr>
-          <p:cNvPr id="11" name="TextBox 10"/>
-          <p:cNvSpPr txBox="1"/>
-          <p:nvPr/>
-        </p:nvSpPr>
-        <p:spPr>
-          <a:xfrm>
-            <a:off x="7726679" y="4864608"/>
-            <a:ext cx="3977639" cy="822960"/>
-          </a:xfrm>
-          <a:prstGeom prst="rect">
-            <a:avLst/>
-          </a:prstGeom>
-          <a:noFill/>
-        </p:spPr>
-        <p:txBody>
-          <a:bodyPr wrap="square" anchor="t">
-            <a:spAutoFit/>
-          </a:bodyPr>
-          <a:lstStyle/>
-          <a:p>
-            <a:pPr algn="l">
-              <a:lnSpc>
-                <a:spcPct val="130000"/>
-              </a:lnSpc>
-            </a:pPr>
-            <a:r>
-              <a:rPr sz="1300" b="0">
-                <a:solidFill>
-                  <a:srgbClr val="646A73"/>
-                </a:solidFill>
-                <a:latin typeface="맑은 고딕"/>
-              </a:rPr>
-              <a:t>전 구간 유의하지 않음 → 원 결론과 일치</a:t>
+                  <a:srgbClr val="1D1F23"/>
+                </a:solidFill>
+                <a:latin typeface="맑은 고딕"/>
+              </a:rPr>
+              <a:t>두 지역 차이를 직접 검정하면</a:t>
+            </a:r>
+          </a:p>
+          <a:p>
+            <a:pPr algn="l">
+              <a:lnSpc>
+                <a:spcPct val="135000"/>
+              </a:lnSpc>
+            </a:pPr>
+            <a:r>
+              <a:rPr sz="1500" b="0">
+                <a:solidFill>
+                  <a:srgbClr val="1D1F23"/>
+                </a:solidFill>
+                <a:latin typeface="맑은 고딕"/>
+              </a:rPr>
+              <a:t>· 상호작용항 p = 0.40 → 차이 근거 없음</a:t>
+            </a:r>
+          </a:p>
+          <a:p>
+            <a:pPr algn="l">
+              <a:lnSpc>
+                <a:spcPct val="135000"/>
+              </a:lnSpc>
+            </a:pPr>
+          </a:p>
+          <a:p>
+            <a:pPr algn="l">
+              <a:lnSpc>
+                <a:spcPct val="135000"/>
+              </a:lnSpc>
+            </a:pPr>
+            <a:r>
+              <a:rPr sz="1500" b="0">
+                <a:solidFill>
+                  <a:srgbClr val="1D1F23"/>
+                </a:solidFill>
+                <a:latin typeface="맑은 고딕"/>
+              </a:rPr>
+              <a:t>→ '어느 지역이 더 취약한가'만으로는</a:t>
+            </a:r>
+          </a:p>
+          <a:p>
+            <a:pPr algn="l">
+              <a:lnSpc>
+                <a:spcPct val="135000"/>
+              </a:lnSpc>
+            </a:pPr>
+            <a:r>
+              <a:rPr sz="1500" b="0">
+                <a:solidFill>
+                  <a:srgbClr val="1D1F23"/>
+                </a:solidFill>
+                <a:latin typeface="맑은 고딕"/>
+              </a:rPr>
+              <a:t>   답할 수 없다. 고객을 나눠 봐야 한다.</a:t>
             </a:r>
           </a:p>
         </p:txBody>
@@ -8982,7 +10823,7 @@
                 </a:solidFill>
                 <a:latin typeface="맑은 고딕"/>
               </a:rPr>
-              <a:t>IMPACT &amp; LIMITS</a:t>
+              <a:t>RESULT ②  ·  핵심 발견</a:t>
             </a:r>
           </a:p>
         </p:txBody>
@@ -9021,7 +10862,7 @@
                 </a:solidFill>
                 <a:latin typeface="맑은 고딕"/>
               </a:rPr>
-              <a:t>어디에 쓸 수 있고, 무엇을 말하지 않는가</a:t>
+              <a:t>고객 구성으로 나누면, 뚜렷하다</a:t>
             </a:r>
           </a:p>
         </p:txBody>
@@ -9065,45 +10906,30 @@
           </a:p>
         </p:txBody>
       </p:sp>
-      <p:sp>
-        <p:nvSpPr>
-          <p:cNvPr id="5" name="TextBox 4"/>
-          <p:cNvSpPr txBox="1"/>
-          <p:nvPr/>
-        </p:nvSpPr>
-        <p:spPr>
-          <a:xfrm>
-            <a:off x="640080" y="1645920"/>
-            <a:ext cx="5486400" cy="365760"/>
-          </a:xfrm>
-          <a:prstGeom prst="rect">
-            <a:avLst/>
-          </a:prstGeom>
-          <a:noFill/>
-        </p:spPr>
-        <p:txBody>
-          <a:bodyPr wrap="square" anchor="t">
-            <a:spAutoFit/>
-          </a:bodyPr>
-          <a:lstStyle/>
-          <a:p>
-            <a:pPr algn="l">
-              <a:lnSpc>
-                <a:spcPct val="120000"/>
-              </a:lnSpc>
-            </a:pPr>
-            <a:r>
-              <a:rPr sz="1700" b="1">
-                <a:solidFill>
-                  <a:srgbClr val="3B6FA0"/>
-                </a:solidFill>
-                <a:latin typeface="맑은 고딕"/>
-              </a:rPr>
-              <a:t>시사점</a:t>
-            </a:r>
-          </a:p>
-        </p:txBody>
-      </p:sp>
+      <p:pic>
+        <p:nvPicPr>
+          <p:cNvPr id="5" name="Picture 4" descr="pt_02_visitor_local_main.png"/>
+          <p:cNvPicPr>
+            <a:picLocks noChangeAspect="1"/>
+          </p:cNvPicPr>
+          <p:nvPr/>
+        </p:nvPicPr>
+        <p:blipFill>
+          <a:blip r:embed="rId2"/>
+          <a:stretch>
+            <a:fillRect/>
+          </a:stretch>
+        </p:blipFill>
+        <p:spPr>
+          <a:xfrm>
+            <a:off x="457200" y="1600200"/>
+            <a:ext cx="6858000" cy="4572000"/>
+          </a:xfrm>
+          <a:prstGeom prst="rect">
+            <a:avLst/>
+          </a:prstGeom>
+        </p:spPr>
+      </p:pic>
       <p:sp>
         <p:nvSpPr>
           <p:cNvPr id="6" name="TextBox 5"/>
@@ -9112,421 +10938,159 @@
         </p:nvSpPr>
         <p:spPr>
           <a:xfrm>
-            <a:off x="640080" y="2148840"/>
-            <a:ext cx="5486400" cy="365760"/>
-          </a:xfrm>
-          <a:prstGeom prst="rect">
-            <a:avLst/>
-          </a:prstGeom>
-          <a:noFill/>
-        </p:spPr>
-        <p:txBody>
-          <a:bodyPr wrap="square" anchor="t">
-            <a:spAutoFit/>
-          </a:bodyPr>
-          <a:lstStyle/>
-          <a:p>
-            <a:pPr algn="l">
-              <a:lnSpc>
-                <a:spcPct val="120000"/>
-              </a:lnSpc>
-            </a:pPr>
-            <a:r>
-              <a:rPr sz="1400" b="1">
+            <a:off x="7498079" y="2011680"/>
+            <a:ext cx="4206240" cy="4206240"/>
+          </a:xfrm>
+          <a:prstGeom prst="rect">
+            <a:avLst/>
+          </a:prstGeom>
+          <a:noFill/>
+        </p:spPr>
+        <p:txBody>
+          <a:bodyPr wrap="square" anchor="t">
+            <a:spAutoFit/>
+          </a:bodyPr>
+          <a:lstStyle/>
+          <a:p>
+            <a:pPr algn="l">
+              <a:lnSpc>
+                <a:spcPct val="135000"/>
+              </a:lnSpc>
+            </a:pPr>
+            <a:r>
+              <a:rPr sz="1500" b="1">
                 <a:solidFill>
                   <a:srgbClr val="1D1F23"/>
                 </a:solidFill>
                 <a:latin typeface="맑은 고딕"/>
               </a:rPr>
-              <a:t>지자체 · 관광공사</a:t>
-            </a:r>
-          </a:p>
-        </p:txBody>
-      </p:sp>
-      <p:sp>
-        <p:nvSpPr>
-          <p:cNvPr id="7" name="TextBox 6"/>
-          <p:cNvSpPr txBox="1"/>
-          <p:nvPr/>
-        </p:nvSpPr>
-        <p:spPr>
-          <a:xfrm>
-            <a:off x="640080" y="2496312"/>
-            <a:ext cx="5394960" cy="731520"/>
-          </a:xfrm>
-          <a:prstGeom prst="rect">
-            <a:avLst/>
-          </a:prstGeom>
-          <a:noFill/>
-        </p:spPr>
-        <p:txBody>
-          <a:bodyPr wrap="square" anchor="t">
-            <a:spAutoFit/>
-          </a:bodyPr>
-          <a:lstStyle/>
-          <a:p>
-            <a:pPr algn="l">
-              <a:lnSpc>
-                <a:spcPct val="130000"/>
-              </a:lnSpc>
-            </a:pPr>
-            <a:r>
-              <a:rPr sz="1300" b="0">
-                <a:solidFill>
-                  <a:srgbClr val="646A73"/>
-                </a:solidFill>
-                <a:latin typeface="맑은 고딕"/>
-              </a:rPr>
-              <a:t>고객 거주지 비중만으로 설문 없이 '상권 기후 취약도' 저비용 모니터링</a:t>
-            </a:r>
-          </a:p>
-        </p:txBody>
-      </p:sp>
-      <p:sp>
-        <p:nvSpPr>
-          <p:cNvPr id="8" name="TextBox 7"/>
-          <p:cNvSpPr txBox="1"/>
-          <p:nvPr/>
-        </p:nvSpPr>
-        <p:spPr>
-          <a:xfrm>
-            <a:off x="640080" y="3291840"/>
-            <a:ext cx="5486400" cy="365760"/>
-          </a:xfrm>
-          <a:prstGeom prst="rect">
-            <a:avLst/>
-          </a:prstGeom>
-          <a:noFill/>
-        </p:spPr>
-        <p:txBody>
-          <a:bodyPr wrap="square" anchor="t">
-            <a:spAutoFit/>
-          </a:bodyPr>
-          <a:lstStyle/>
-          <a:p>
-            <a:pPr algn="l">
-              <a:lnSpc>
-                <a:spcPct val="120000"/>
-              </a:lnSpc>
-            </a:pPr>
-            <a:r>
-              <a:rPr sz="1400" b="1">
+              <a:t>춘천, 호우일 (18일)</a:t>
+            </a:r>
+          </a:p>
+          <a:p>
+            <a:pPr algn="l">
+              <a:lnSpc>
+                <a:spcPct val="135000"/>
+              </a:lnSpc>
+            </a:pPr>
+            <a:r>
+              <a:rPr sz="1500" b="0">
                 <a:solidFill>
                   <a:srgbClr val="1D1F23"/>
                 </a:solidFill>
                 <a:latin typeface="맑은 고딕"/>
               </a:rPr>
-              <a:t>카드사 · 금융</a:t>
-            </a:r>
-          </a:p>
-        </p:txBody>
-      </p:sp>
-      <p:sp>
-        <p:nvSpPr>
-          <p:cNvPr id="9" name="TextBox 8"/>
-          <p:cNvSpPr txBox="1"/>
-          <p:nvPr/>
-        </p:nvSpPr>
-        <p:spPr>
-          <a:xfrm>
-            <a:off x="640080" y="3639312"/>
-            <a:ext cx="5394960" cy="731520"/>
-          </a:xfrm>
-          <a:prstGeom prst="rect">
-            <a:avLst/>
-          </a:prstGeom>
-          <a:noFill/>
-        </p:spPr>
-        <p:txBody>
-          <a:bodyPr wrap="square" anchor="t">
-            <a:spAutoFit/>
-          </a:bodyPr>
-          <a:lstStyle/>
-          <a:p>
-            <a:pPr algn="l">
-              <a:lnSpc>
-                <a:spcPct val="130000"/>
-              </a:lnSpc>
-            </a:pPr>
-            <a:r>
-              <a:rPr sz="1300" b="0">
-                <a:solidFill>
-                  <a:srgbClr val="646A73"/>
-                </a:solidFill>
-                <a:latin typeface="맑은 고딕"/>
-              </a:rPr>
-              <a:t>업종·지역별 비 민감도를 날씨 연동 소상공인 상품의 초기 리스크 근거로</a:t>
-            </a:r>
-          </a:p>
-        </p:txBody>
-      </p:sp>
-      <p:sp>
-        <p:nvSpPr>
-          <p:cNvPr id="10" name="TextBox 9"/>
-          <p:cNvSpPr txBox="1"/>
-          <p:nvPr/>
-        </p:nvSpPr>
-        <p:spPr>
-          <a:xfrm>
-            <a:off x="640080" y="4434840"/>
-            <a:ext cx="5486400" cy="365760"/>
-          </a:xfrm>
-          <a:prstGeom prst="rect">
-            <a:avLst/>
-          </a:prstGeom>
-          <a:noFill/>
-        </p:spPr>
-        <p:txBody>
-          <a:bodyPr wrap="square" anchor="t">
-            <a:spAutoFit/>
-          </a:bodyPr>
-          <a:lstStyle/>
-          <a:p>
-            <a:pPr algn="l">
-              <a:lnSpc>
-                <a:spcPct val="120000"/>
-              </a:lnSpc>
-            </a:pPr>
-            <a:r>
-              <a:rPr sz="1400" b="1">
+              <a:t>· 타 시도 방문객  −19.1%</a:t>
+            </a:r>
+          </a:p>
+          <a:p>
+            <a:pPr algn="l">
+              <a:lnSpc>
+                <a:spcPct val="135000"/>
+              </a:lnSpc>
+            </a:pPr>
+            <a:r>
+              <a:rPr sz="1500" b="0">
                 <a:solidFill>
                   <a:srgbClr val="1D1F23"/>
                 </a:solidFill>
                 <a:latin typeface="맑은 고딕"/>
               </a:rPr>
-              <a:t>일반화</a:t>
-            </a:r>
-          </a:p>
-        </p:txBody>
-      </p:sp>
-      <p:sp>
-        <p:nvSpPr>
-          <p:cNvPr id="11" name="TextBox 10"/>
-          <p:cNvSpPr txBox="1"/>
-          <p:nvPr/>
-        </p:nvSpPr>
-        <p:spPr>
-          <a:xfrm>
-            <a:off x="640080" y="4782312"/>
-            <a:ext cx="5394960" cy="731520"/>
-          </a:xfrm>
-          <a:prstGeom prst="rect">
-            <a:avLst/>
-          </a:prstGeom>
-          <a:noFill/>
-        </p:spPr>
-        <p:txBody>
-          <a:bodyPr wrap="square" anchor="t">
-            <a:spAutoFit/>
-          </a:bodyPr>
-          <a:lstStyle/>
-          <a:p>
-            <a:pPr algn="l">
-              <a:lnSpc>
-                <a:spcPct val="130000"/>
-              </a:lnSpc>
-            </a:pPr>
-            <a:r>
-              <a:rPr sz="1300" b="0">
-                <a:solidFill>
-                  <a:srgbClr val="646A73"/>
-                </a:solidFill>
-                <a:latin typeface="맑은 고딕"/>
-              </a:rPr>
-              <a:t>'외지 방문객 매출 비중' 지표는 다른 관광도시에도 같은 방법으로 적용 가능</a:t>
-            </a:r>
-          </a:p>
-        </p:txBody>
-      </p:sp>
-      <p:sp>
-        <p:nvSpPr>
-          <p:cNvPr id="12" name="Rounded Rectangle 11"/>
-          <p:cNvSpPr/>
-          <p:nvPr/>
-        </p:nvSpPr>
-        <p:spPr>
-          <a:xfrm>
-            <a:off x="6492240" y="1645920"/>
-            <a:ext cx="5120640" cy="4480560"/>
-          </a:xfrm>
-          <a:prstGeom prst="roundRect">
-            <a:avLst>
-              <a:gd name="adj" fmla="val 2448"/>
-            </a:avLst>
-          </a:prstGeom>
-          <a:solidFill>
-            <a:srgbClr val="F4EFE4"/>
-          </a:solidFill>
-          <a:ln>
-            <a:noFill/>
-          </a:ln>
-          <a:effectLst/>
-        </p:spPr>
-        <p:style>
-          <a:lnRef idx="1">
-            <a:schemeClr val="accent1"/>
-          </a:lnRef>
-          <a:fillRef idx="3">
-            <a:schemeClr val="accent1"/>
-          </a:fillRef>
-          <a:effectRef idx="2">
-            <a:schemeClr val="accent1"/>
-          </a:effectRef>
-          <a:fontRef idx="minor">
-            <a:schemeClr val="lt1"/>
-          </a:fontRef>
-        </p:style>
-        <p:txBody>
-          <a:bodyPr rtlCol="0" anchor="ctr"/>
-          <a:lstStyle/>
-          <a:p>
-            <a:pPr algn="ctr"/>
-          </a:p>
-        </p:txBody>
-      </p:sp>
-      <p:sp>
-        <p:nvSpPr>
-          <p:cNvPr id="13" name="TextBox 12"/>
-          <p:cNvSpPr txBox="1"/>
-          <p:nvPr/>
-        </p:nvSpPr>
-        <p:spPr>
-          <a:xfrm>
-            <a:off x="6766560" y="1828800"/>
-            <a:ext cx="4663440" cy="365760"/>
-          </a:xfrm>
-          <a:prstGeom prst="rect">
-            <a:avLst/>
-          </a:prstGeom>
-          <a:noFill/>
-        </p:spPr>
-        <p:txBody>
-          <a:bodyPr wrap="square" anchor="t">
-            <a:spAutoFit/>
-          </a:bodyPr>
-          <a:lstStyle/>
-          <a:p>
-            <a:pPr algn="l">
-              <a:lnSpc>
-                <a:spcPct val="120000"/>
-              </a:lnSpc>
-            </a:pPr>
-            <a:r>
-              <a:rPr sz="1700" b="1">
-                <a:solidFill>
-                  <a:srgbClr val="D45B5B"/>
-                </a:solidFill>
-                <a:latin typeface="맑은 고딕"/>
-              </a:rPr>
-              <a:t>한계</a:t>
-            </a:r>
-          </a:p>
-        </p:txBody>
-      </p:sp>
-      <p:sp>
-        <p:nvSpPr>
-          <p:cNvPr id="14" name="TextBox 13"/>
-          <p:cNvSpPr txBox="1"/>
-          <p:nvPr/>
-        </p:nvSpPr>
-        <p:spPr>
-          <a:xfrm>
-            <a:off x="6766560" y="2331720"/>
-            <a:ext cx="4663440" cy="3657600"/>
-          </a:xfrm>
-          <a:prstGeom prst="rect">
-            <a:avLst/>
-          </a:prstGeom>
-          <a:noFill/>
-        </p:spPr>
-        <p:txBody>
-          <a:bodyPr wrap="square" anchor="t">
-            <a:spAutoFit/>
-          </a:bodyPr>
-          <a:lstStyle/>
-          <a:p>
-            <a:pPr algn="l">
-              <a:lnSpc>
-                <a:spcPct val="130000"/>
-              </a:lnSpc>
-            </a:pPr>
-            <a:r>
-              <a:rPr sz="1350" b="0">
+              <a:t>   95% CI  −25.0% ~ −12.7%</a:t>
+            </a:r>
+          </a:p>
+          <a:p>
+            <a:pPr algn="l">
+              <a:lnSpc>
+                <a:spcPct val="135000"/>
+              </a:lnSpc>
+            </a:pPr>
+            <a:r>
+              <a:rPr sz="1500" b="0">
                 <a:solidFill>
                   <a:srgbClr val="1D1F23"/>
                 </a:solidFill>
                 <a:latin typeface="맑은 고딕"/>
               </a:rPr>
-              <a:t>· 기상 관측소 도시당 1곳 — 강남구는 약 10km 떨어진 종로구 관측소 값으로 대체</a:t>
-            </a:r>
-          </a:p>
-          <a:p>
-            <a:pPr algn="l">
-              <a:lnSpc>
-                <a:spcPct val="130000"/>
-              </a:lnSpc>
-            </a:pPr>
-          </a:p>
-          <a:p>
-            <a:pPr algn="l">
-              <a:lnSpc>
-                <a:spcPct val="130000"/>
-              </a:lnSpc>
-            </a:pPr>
-            <a:r>
-              <a:rPr sz="1350" b="0">
+              <a:t>· 동일 시도 거주자  −6.4%</a:t>
+            </a:r>
+          </a:p>
+          <a:p>
+            <a:pPr algn="l">
+              <a:lnSpc>
+                <a:spcPct val="135000"/>
+              </a:lnSpc>
+            </a:pPr>
+            <a:r>
+              <a:rPr sz="1500" b="0">
                 <a:solidFill>
                   <a:srgbClr val="1D1F23"/>
                 </a:solidFill>
                 <a:latin typeface="맑은 고딕"/>
               </a:rPr>
-              <a:t>· SK 유동인구는 월×요일 평균 패턴 → 검정에는 쓰지 않고 배경 지표로만 사용</a:t>
-            </a:r>
-          </a:p>
-          <a:p>
-            <a:pPr algn="l">
-              <a:lnSpc>
-                <a:spcPct val="130000"/>
-              </a:lnSpc>
-            </a:pPr>
-          </a:p>
-          <a:p>
-            <a:pPr algn="l">
-              <a:lnSpc>
-                <a:spcPct val="130000"/>
-              </a:lnSpc>
-            </a:pPr>
-            <a:r>
-              <a:rPr sz="1350" b="0">
+              <a:t>   95% CI  −9.9% ~ −2.7%</a:t>
+            </a:r>
+          </a:p>
+          <a:p>
+            <a:pPr algn="l">
+              <a:lnSpc>
+                <a:spcPct val="135000"/>
+              </a:lnSpc>
+            </a:pPr>
+          </a:p>
+          <a:p>
+            <a:pPr algn="l">
+              <a:lnSpc>
+                <a:spcPct val="135000"/>
+              </a:lnSpc>
+            </a:pPr>
+            <a:r>
+              <a:rPr sz="1500" b="0">
                 <a:solidFill>
                   <a:srgbClr val="1D1F23"/>
                 </a:solidFill>
                 <a:latin typeface="맑은 고딕"/>
               </a:rPr>
-              <a:t>· 비교 지역 2곳뿐 → 지역 간 비교의 검정력 한계</a:t>
-            </a:r>
-          </a:p>
-          <a:p>
-            <a:pPr algn="l">
-              <a:lnSpc>
-                <a:spcPct val="130000"/>
-              </a:lnSpc>
-            </a:pPr>
-          </a:p>
-          <a:p>
-            <a:pPr algn="l">
-              <a:lnSpc>
-                <a:spcPct val="130000"/>
-              </a:lnSpc>
-            </a:pPr>
-            <a:r>
-              <a:rPr sz="1350" b="0">
+              <a:t>두 신뢰구간이 겹치지 않음</a:t>
+            </a:r>
+          </a:p>
+          <a:p>
+            <a:pPr algn="l">
+              <a:lnSpc>
+                <a:spcPct val="135000"/>
+              </a:lnSpc>
+            </a:pPr>
+            <a:r>
+              <a:rPr sz="1500" b="0">
                 <a:solidFill>
                   <a:srgbClr val="1D1F23"/>
                 </a:solidFill>
                 <a:latin typeface="맑은 고딕"/>
               </a:rPr>
-              <a:t>· 연관성 분석이며 인과관계를 확정한 것은 아님</a:t>
+              <a:t>→ 방문객이 확실히 더 크게 줄어든다</a:t>
+            </a:r>
+          </a:p>
+          <a:p>
+            <a:pPr algn="l">
+              <a:lnSpc>
+                <a:spcPct val="135000"/>
+              </a:lnSpc>
+            </a:pPr>
+          </a:p>
+          <a:p>
+            <a:pPr algn="l">
+              <a:lnSpc>
+                <a:spcPct val="135000"/>
+              </a:lnSpc>
+            </a:pPr>
+            <a:r>
+              <a:rPr sz="1500" b="0">
+                <a:solidFill>
+                  <a:srgbClr val="1D1F23"/>
+                </a:solidFill>
+                <a:latin typeface="맑은 고딕"/>
+              </a:rPr>
+              <a:t>강남은 두 그룹 모두 유의하지 않음</a:t>
             </a:r>
           </a:p>
         </p:txBody>

--- a/Portfolio_slides.pptx
+++ b/Portfolio_slides.pptx
@@ -9532,6 +9532,36 @@
           <a:lstStyle/>
           <a:p>
             <a:pPr algn="ctr"/>
+          </a:p>
+        </p:txBody>
+      </p:sp>
+      <p:sp>
+        <p:nvSpPr>
+          <p:cNvPr id="6" name="TextBox 5"/>
+          <p:cNvSpPr txBox="1"/>
+          <p:nvPr/>
+        </p:nvSpPr>
+        <p:spPr>
+          <a:xfrm>
+            <a:off x="640080" y="1691640"/>
+            <a:ext cx="457200" cy="457200"/>
+          </a:xfrm>
+          <a:prstGeom prst="rect">
+            <a:avLst/>
+          </a:prstGeom>
+          <a:noFill/>
+        </p:spPr>
+        <p:txBody>
+          <a:bodyPr wrap="square" anchor="ctr">
+            <a:spAutoFit/>
+          </a:bodyPr>
+          <a:lstStyle/>
+          <a:p>
+            <a:pPr algn="ctr">
+              <a:lnSpc>
+                <a:spcPct val="120000"/>
+              </a:lnSpc>
+            </a:pPr>
             <a:r>
               <a:rPr sz="1400" b="1">
                 <a:solidFill>
@@ -9546,7 +9576,7 @@
       </p:sp>
       <p:sp>
         <p:nvSpPr>
-          <p:cNvPr id="6" name="Rounded Rectangle 5"/>
+          <p:cNvPr id="7" name="Rounded Rectangle 6"/>
           <p:cNvSpPr/>
           <p:nvPr/>
         </p:nvSpPr>
@@ -9589,6 +9619,36 @@
           <a:lstStyle/>
           <a:p>
             <a:pPr algn="ctr"/>
+          </a:p>
+        </p:txBody>
+      </p:sp>
+      <p:sp>
+        <p:nvSpPr>
+          <p:cNvPr id="8" name="TextBox 7"/>
+          <p:cNvSpPr txBox="1"/>
+          <p:nvPr/>
+        </p:nvSpPr>
+        <p:spPr>
+          <a:xfrm>
+            <a:off x="1371600" y="1719072"/>
+            <a:ext cx="731520" cy="384048"/>
+          </a:xfrm>
+          <a:prstGeom prst="rect">
+            <a:avLst/>
+          </a:prstGeom>
+          <a:noFill/>
+        </p:spPr>
+        <p:txBody>
+          <a:bodyPr wrap="square" anchor="ctr">
+            <a:spAutoFit/>
+          </a:bodyPr>
+          <a:lstStyle/>
+          <a:p>
+            <a:pPr algn="ctr">
+              <a:lnSpc>
+                <a:spcPct val="120000"/>
+              </a:lnSpc>
+            </a:pPr>
             <a:r>
               <a:rPr sz="1200" b="1">
                 <a:solidFill>
@@ -9603,7 +9663,7 @@
       </p:sp>
       <p:sp>
         <p:nvSpPr>
-          <p:cNvPr id="7" name="TextBox 6"/>
+          <p:cNvPr id="9" name="TextBox 8"/>
           <p:cNvSpPr txBox="1"/>
           <p:nvPr/>
         </p:nvSpPr>
@@ -9642,7 +9702,7 @@
       </p:sp>
       <p:sp>
         <p:nvSpPr>
-          <p:cNvPr id="8" name="TextBox 7"/>
+          <p:cNvPr id="10" name="TextBox 9"/>
           <p:cNvSpPr txBox="1"/>
           <p:nvPr/>
         </p:nvSpPr>
@@ -9681,7 +9741,7 @@
       </p:sp>
       <p:sp>
         <p:nvSpPr>
-          <p:cNvPr id="9" name="Oval 8"/>
+          <p:cNvPr id="11" name="Oval 10"/>
           <p:cNvSpPr/>
           <p:nvPr/>
         </p:nvSpPr>
@@ -9720,6 +9780,36 @@
           <a:lstStyle/>
           <a:p>
             <a:pPr algn="ctr"/>
+          </a:p>
+        </p:txBody>
+      </p:sp>
+      <p:sp>
+        <p:nvSpPr>
+          <p:cNvPr id="12" name="TextBox 11"/>
+          <p:cNvSpPr txBox="1"/>
+          <p:nvPr/>
+        </p:nvSpPr>
+        <p:spPr>
+          <a:xfrm>
+            <a:off x="640080" y="2624328"/>
+            <a:ext cx="457200" cy="457200"/>
+          </a:xfrm>
+          <a:prstGeom prst="rect">
+            <a:avLst/>
+          </a:prstGeom>
+          <a:noFill/>
+        </p:spPr>
+        <p:txBody>
+          <a:bodyPr wrap="square" anchor="ctr">
+            <a:spAutoFit/>
+          </a:bodyPr>
+          <a:lstStyle/>
+          <a:p>
+            <a:pPr algn="ctr">
+              <a:lnSpc>
+                <a:spcPct val="120000"/>
+              </a:lnSpc>
+            </a:pPr>
             <a:r>
               <a:rPr sz="1400" b="1">
                 <a:solidFill>
@@ -9734,7 +9824,7 @@
       </p:sp>
       <p:sp>
         <p:nvSpPr>
-          <p:cNvPr id="10" name="Rounded Rectangle 9"/>
+          <p:cNvPr id="13" name="Rounded Rectangle 12"/>
           <p:cNvSpPr/>
           <p:nvPr/>
         </p:nvSpPr>
@@ -9777,6 +9867,36 @@
           <a:lstStyle/>
           <a:p>
             <a:pPr algn="ctr"/>
+          </a:p>
+        </p:txBody>
+      </p:sp>
+      <p:sp>
+        <p:nvSpPr>
+          <p:cNvPr id="14" name="TextBox 13"/>
+          <p:cNvSpPr txBox="1"/>
+          <p:nvPr/>
+        </p:nvSpPr>
+        <p:spPr>
+          <a:xfrm>
+            <a:off x="1371600" y="2651760"/>
+            <a:ext cx="731520" cy="384048"/>
+          </a:xfrm>
+          <a:prstGeom prst="rect">
+            <a:avLst/>
+          </a:prstGeom>
+          <a:noFill/>
+        </p:spPr>
+        <p:txBody>
+          <a:bodyPr wrap="square" anchor="ctr">
+            <a:spAutoFit/>
+          </a:bodyPr>
+          <a:lstStyle/>
+          <a:p>
+            <a:pPr algn="ctr">
+              <a:lnSpc>
+                <a:spcPct val="120000"/>
+              </a:lnSpc>
+            </a:pPr>
             <a:r>
               <a:rPr sz="1200" b="1">
                 <a:solidFill>
@@ -9791,7 +9911,7 @@
       </p:sp>
       <p:sp>
         <p:nvSpPr>
-          <p:cNvPr id="11" name="TextBox 10"/>
+          <p:cNvPr id="15" name="TextBox 14"/>
           <p:cNvSpPr txBox="1"/>
           <p:nvPr/>
         </p:nvSpPr>
@@ -9830,7 +9950,7 @@
       </p:sp>
       <p:sp>
         <p:nvSpPr>
-          <p:cNvPr id="12" name="TextBox 11"/>
+          <p:cNvPr id="16" name="TextBox 15"/>
           <p:cNvSpPr txBox="1"/>
           <p:nvPr/>
         </p:nvSpPr>
@@ -9869,7 +9989,7 @@
       </p:sp>
       <p:sp>
         <p:nvSpPr>
-          <p:cNvPr id="13" name="Oval 12"/>
+          <p:cNvPr id="17" name="Oval 16"/>
           <p:cNvSpPr/>
           <p:nvPr/>
         </p:nvSpPr>
@@ -9908,6 +10028,36 @@
           <a:lstStyle/>
           <a:p>
             <a:pPr algn="ctr"/>
+          </a:p>
+        </p:txBody>
+      </p:sp>
+      <p:sp>
+        <p:nvSpPr>
+          <p:cNvPr id="18" name="TextBox 17"/>
+          <p:cNvSpPr txBox="1"/>
+          <p:nvPr/>
+        </p:nvSpPr>
+        <p:spPr>
+          <a:xfrm>
+            <a:off x="640080" y="3557016"/>
+            <a:ext cx="457200" cy="457200"/>
+          </a:xfrm>
+          <a:prstGeom prst="rect">
+            <a:avLst/>
+          </a:prstGeom>
+          <a:noFill/>
+        </p:spPr>
+        <p:txBody>
+          <a:bodyPr wrap="square" anchor="ctr">
+            <a:spAutoFit/>
+          </a:bodyPr>
+          <a:lstStyle/>
+          <a:p>
+            <a:pPr algn="ctr">
+              <a:lnSpc>
+                <a:spcPct val="120000"/>
+              </a:lnSpc>
+            </a:pPr>
             <a:r>
               <a:rPr sz="1400" b="1">
                 <a:solidFill>
@@ -9922,7 +10072,7 @@
       </p:sp>
       <p:sp>
         <p:nvSpPr>
-          <p:cNvPr id="14" name="Rounded Rectangle 13"/>
+          <p:cNvPr id="19" name="Rounded Rectangle 18"/>
           <p:cNvSpPr/>
           <p:nvPr/>
         </p:nvSpPr>
@@ -9965,6 +10115,36 @@
           <a:lstStyle/>
           <a:p>
             <a:pPr algn="ctr"/>
+          </a:p>
+        </p:txBody>
+      </p:sp>
+      <p:sp>
+        <p:nvSpPr>
+          <p:cNvPr id="20" name="TextBox 19"/>
+          <p:cNvSpPr txBox="1"/>
+          <p:nvPr/>
+        </p:nvSpPr>
+        <p:spPr>
+          <a:xfrm>
+            <a:off x="1371600" y="3584448"/>
+            <a:ext cx="731520" cy="384048"/>
+          </a:xfrm>
+          <a:prstGeom prst="rect">
+            <a:avLst/>
+          </a:prstGeom>
+          <a:noFill/>
+        </p:spPr>
+        <p:txBody>
+          <a:bodyPr wrap="square" anchor="ctr">
+            <a:spAutoFit/>
+          </a:bodyPr>
+          <a:lstStyle/>
+          <a:p>
+            <a:pPr algn="ctr">
+              <a:lnSpc>
+                <a:spcPct val="120000"/>
+              </a:lnSpc>
+            </a:pPr>
             <a:r>
               <a:rPr sz="1200" b="1">
                 <a:solidFill>
@@ -9979,7 +10159,7 @@
       </p:sp>
       <p:sp>
         <p:nvSpPr>
-          <p:cNvPr id="15" name="TextBox 14"/>
+          <p:cNvPr id="21" name="TextBox 20"/>
           <p:cNvSpPr txBox="1"/>
           <p:nvPr/>
         </p:nvSpPr>
@@ -10018,7 +10198,7 @@
       </p:sp>
       <p:sp>
         <p:nvSpPr>
-          <p:cNvPr id="16" name="TextBox 15"/>
+          <p:cNvPr id="22" name="TextBox 21"/>
           <p:cNvSpPr txBox="1"/>
           <p:nvPr/>
         </p:nvSpPr>
@@ -10057,7 +10237,7 @@
       </p:sp>
       <p:sp>
         <p:nvSpPr>
-          <p:cNvPr id="17" name="Oval 16"/>
+          <p:cNvPr id="23" name="Oval 22"/>
           <p:cNvSpPr/>
           <p:nvPr/>
         </p:nvSpPr>
@@ -10096,6 +10276,36 @@
           <a:lstStyle/>
           <a:p>
             <a:pPr algn="ctr"/>
+          </a:p>
+        </p:txBody>
+      </p:sp>
+      <p:sp>
+        <p:nvSpPr>
+          <p:cNvPr id="24" name="TextBox 23"/>
+          <p:cNvSpPr txBox="1"/>
+          <p:nvPr/>
+        </p:nvSpPr>
+        <p:spPr>
+          <a:xfrm>
+            <a:off x="640080" y="4489704"/>
+            <a:ext cx="457200" cy="457200"/>
+          </a:xfrm>
+          <a:prstGeom prst="rect">
+            <a:avLst/>
+          </a:prstGeom>
+          <a:noFill/>
+        </p:spPr>
+        <p:txBody>
+          <a:bodyPr wrap="square" anchor="ctr">
+            <a:spAutoFit/>
+          </a:bodyPr>
+          <a:lstStyle/>
+          <a:p>
+            <a:pPr algn="ctr">
+              <a:lnSpc>
+                <a:spcPct val="120000"/>
+              </a:lnSpc>
+            </a:pPr>
             <a:r>
               <a:rPr sz="1400" b="1">
                 <a:solidFill>
@@ -10110,7 +10320,7 @@
       </p:sp>
       <p:sp>
         <p:nvSpPr>
-          <p:cNvPr id="18" name="Rounded Rectangle 17"/>
+          <p:cNvPr id="25" name="Rounded Rectangle 24"/>
           <p:cNvSpPr/>
           <p:nvPr/>
         </p:nvSpPr>
@@ -10153,6 +10363,36 @@
           <a:lstStyle/>
           <a:p>
             <a:pPr algn="ctr"/>
+          </a:p>
+        </p:txBody>
+      </p:sp>
+      <p:sp>
+        <p:nvSpPr>
+          <p:cNvPr id="26" name="TextBox 25"/>
+          <p:cNvSpPr txBox="1"/>
+          <p:nvPr/>
+        </p:nvSpPr>
+        <p:spPr>
+          <a:xfrm>
+            <a:off x="1371600" y="4517136"/>
+            <a:ext cx="731520" cy="384048"/>
+          </a:xfrm>
+          <a:prstGeom prst="rect">
+            <a:avLst/>
+          </a:prstGeom>
+          <a:noFill/>
+        </p:spPr>
+        <p:txBody>
+          <a:bodyPr wrap="square" anchor="ctr">
+            <a:spAutoFit/>
+          </a:bodyPr>
+          <a:lstStyle/>
+          <a:p>
+            <a:pPr algn="ctr">
+              <a:lnSpc>
+                <a:spcPct val="120000"/>
+              </a:lnSpc>
+            </a:pPr>
             <a:r>
               <a:rPr sz="1200" b="1">
                 <a:solidFill>
@@ -10167,7 +10407,7 @@
       </p:sp>
       <p:sp>
         <p:nvSpPr>
-          <p:cNvPr id="19" name="TextBox 18"/>
+          <p:cNvPr id="27" name="TextBox 26"/>
           <p:cNvSpPr txBox="1"/>
           <p:nvPr/>
         </p:nvSpPr>
@@ -10206,7 +10446,7 @@
       </p:sp>
       <p:sp>
         <p:nvSpPr>
-          <p:cNvPr id="20" name="TextBox 19"/>
+          <p:cNvPr id="28" name="TextBox 27"/>
           <p:cNvSpPr txBox="1"/>
           <p:nvPr/>
         </p:nvSpPr>
@@ -10245,7 +10485,7 @@
       </p:sp>
       <p:sp>
         <p:nvSpPr>
-          <p:cNvPr id="21" name="Oval 20"/>
+          <p:cNvPr id="29" name="Oval 28"/>
           <p:cNvSpPr/>
           <p:nvPr/>
         </p:nvSpPr>
@@ -10284,6 +10524,36 @@
           <a:lstStyle/>
           <a:p>
             <a:pPr algn="ctr"/>
+          </a:p>
+        </p:txBody>
+      </p:sp>
+      <p:sp>
+        <p:nvSpPr>
+          <p:cNvPr id="30" name="TextBox 29"/>
+          <p:cNvSpPr txBox="1"/>
+          <p:nvPr/>
+        </p:nvSpPr>
+        <p:spPr>
+          <a:xfrm>
+            <a:off x="640080" y="5422392"/>
+            <a:ext cx="457200" cy="457200"/>
+          </a:xfrm>
+          <a:prstGeom prst="rect">
+            <a:avLst/>
+          </a:prstGeom>
+          <a:noFill/>
+        </p:spPr>
+        <p:txBody>
+          <a:bodyPr wrap="square" anchor="ctr">
+            <a:spAutoFit/>
+          </a:bodyPr>
+          <a:lstStyle/>
+          <a:p>
+            <a:pPr algn="ctr">
+              <a:lnSpc>
+                <a:spcPct val="120000"/>
+              </a:lnSpc>
+            </a:pPr>
             <a:r>
               <a:rPr sz="1400" b="1">
                 <a:solidFill>
@@ -10298,7 +10568,7 @@
       </p:sp>
       <p:sp>
         <p:nvSpPr>
-          <p:cNvPr id="22" name="Rounded Rectangle 21"/>
+          <p:cNvPr id="31" name="Rounded Rectangle 30"/>
           <p:cNvSpPr/>
           <p:nvPr/>
         </p:nvSpPr>
@@ -10341,6 +10611,36 @@
           <a:lstStyle/>
           <a:p>
             <a:pPr algn="ctr"/>
+          </a:p>
+        </p:txBody>
+      </p:sp>
+      <p:sp>
+        <p:nvSpPr>
+          <p:cNvPr id="32" name="TextBox 31"/>
+          <p:cNvSpPr txBox="1"/>
+          <p:nvPr/>
+        </p:nvSpPr>
+        <p:spPr>
+          <a:xfrm>
+            <a:off x="1371600" y="5449824"/>
+            <a:ext cx="731520" cy="384048"/>
+          </a:xfrm>
+          <a:prstGeom prst="rect">
+            <a:avLst/>
+          </a:prstGeom>
+          <a:noFill/>
+        </p:spPr>
+        <p:txBody>
+          <a:bodyPr wrap="square" anchor="ctr">
+            <a:spAutoFit/>
+          </a:bodyPr>
+          <a:lstStyle/>
+          <a:p>
+            <a:pPr algn="ctr">
+              <a:lnSpc>
+                <a:spcPct val="120000"/>
+              </a:lnSpc>
+            </a:pPr>
             <a:r>
               <a:rPr sz="1200" b="1">
                 <a:solidFill>
@@ -10355,7 +10655,7 @@
       </p:sp>
       <p:sp>
         <p:nvSpPr>
-          <p:cNvPr id="23" name="TextBox 22"/>
+          <p:cNvPr id="33" name="TextBox 32"/>
           <p:cNvSpPr txBox="1"/>
           <p:nvPr/>
         </p:nvSpPr>
@@ -10394,7 +10694,7 @@
       </p:sp>
       <p:sp>
         <p:nvSpPr>
-          <p:cNvPr id="24" name="TextBox 23"/>
+          <p:cNvPr id="34" name="TextBox 33"/>
           <p:cNvSpPr txBox="1"/>
           <p:nvPr/>
         </p:nvSpPr>
